--- a/docs/pptx/whole/ritu-linsubhr-disc-anemia3.pptx
+++ b/docs/pptx/whole/ritu-linsubhr-disc-anemia3.pptx
@@ -2443,7 +2443,7 @@
           </p:nvSpPr>
           <p:spPr>
             <a:xfrm>
-              <a:off x="1942521" y="2073503"/>
+              <a:off x="1943067" y="2073503"/>
               <a:ext cx="0" cy="3649639"/>
             </a:xfrm>
             <a:custGeom>
@@ -2486,7 +2486,7 @@
           </p:nvSpPr>
           <p:spPr>
             <a:xfrm>
-              <a:off x="4460699" y="2073503"/>
+              <a:off x="4460487" y="2073503"/>
               <a:ext cx="0" cy="3649639"/>
             </a:xfrm>
             <a:custGeom>
@@ -2529,7 +2529,7 @@
           </p:nvSpPr>
           <p:spPr>
             <a:xfrm>
-              <a:off x="6978877" y="2073503"/>
+              <a:off x="6977907" y="2073503"/>
               <a:ext cx="0" cy="3649639"/>
             </a:xfrm>
             <a:custGeom>
@@ -2787,7 +2787,7 @@
           </p:nvSpPr>
           <p:spPr>
             <a:xfrm>
-              <a:off x="3201610" y="2073503"/>
+              <a:off x="3201777" y="2073503"/>
               <a:ext cx="0" cy="3649639"/>
             </a:xfrm>
             <a:custGeom>
@@ -2830,7 +2830,7 @@
           </p:nvSpPr>
           <p:spPr>
             <a:xfrm>
-              <a:off x="5719788" y="2073503"/>
+              <a:off x="5719197" y="2073503"/>
               <a:ext cx="0" cy="3649639"/>
             </a:xfrm>
             <a:custGeom>
@@ -2873,7 +2873,7 @@
           </p:nvSpPr>
           <p:spPr>
             <a:xfrm>
-              <a:off x="8237966" y="2073503"/>
+              <a:off x="8236616" y="2073503"/>
               <a:ext cx="0" cy="3649639"/>
             </a:xfrm>
             <a:custGeom>
@@ -2917,539 +2917,539 @@
           <p:spPr>
             <a:xfrm>
               <a:off x="1172049" y="2073503"/>
-              <a:ext cx="7090630" cy="3242879"/>
+              <a:ext cx="7090630" cy="3242770"/>
             </a:xfrm>
             <a:custGeom>
               <a:avLst/>
               <a:pathLst>
-                <a:path w="7090630" h="3242879">
+                <a:path w="7090630" h="3242770">
                   <a:moveTo>
-                    <a:pt x="1735032" y="0"/>
+                    <a:pt x="1754262" y="0"/>
                   </a:moveTo>
                   <a:lnTo>
-                    <a:pt x="1790563" y="95549"/>
-                  </a:lnTo>
-                  <a:lnTo>
-                    <a:pt x="1862185" y="214463"/>
-                  </a:lnTo>
-                  <a:lnTo>
-                    <a:pt x="1933808" y="329203"/>
-                  </a:lnTo>
-                  <a:lnTo>
-                    <a:pt x="2005430" y="439916"/>
-                  </a:lnTo>
-                  <a:lnTo>
-                    <a:pt x="2077053" y="546744"/>
-                  </a:lnTo>
-                  <a:lnTo>
-                    <a:pt x="2148675" y="649822"/>
-                  </a:lnTo>
-                  <a:lnTo>
-                    <a:pt x="2220298" y="749283"/>
-                  </a:lnTo>
-                  <a:lnTo>
-                    <a:pt x="2291920" y="845253"/>
-                  </a:lnTo>
-                  <a:lnTo>
-                    <a:pt x="2363543" y="937855"/>
-                  </a:lnTo>
-                  <a:lnTo>
-                    <a:pt x="2435165" y="1027206"/>
-                  </a:lnTo>
-                  <a:lnTo>
-                    <a:pt x="2506788" y="1113422"/>
-                  </a:lnTo>
-                  <a:lnTo>
-                    <a:pt x="2578410" y="1196612"/>
-                  </a:lnTo>
-                  <a:lnTo>
-                    <a:pt x="2650033" y="1276882"/>
-                  </a:lnTo>
-                  <a:lnTo>
-                    <a:pt x="2721655" y="1354336"/>
-                  </a:lnTo>
-                  <a:lnTo>
-                    <a:pt x="2793278" y="1429070"/>
-                  </a:lnTo>
-                  <a:lnTo>
-                    <a:pt x="2864901" y="1501182"/>
-                  </a:lnTo>
-                  <a:lnTo>
-                    <a:pt x="2936523" y="1570763"/>
-                  </a:lnTo>
-                  <a:lnTo>
-                    <a:pt x="3008146" y="1637902"/>
-                  </a:lnTo>
-                  <a:lnTo>
-                    <a:pt x="3079768" y="1702684"/>
-                  </a:lnTo>
-                  <a:lnTo>
-                    <a:pt x="3151391" y="1765193"/>
-                  </a:lnTo>
-                  <a:lnTo>
-                    <a:pt x="3223013" y="1825509"/>
-                  </a:lnTo>
-                  <a:lnTo>
-                    <a:pt x="3294636" y="1883707"/>
-                  </a:lnTo>
-                  <a:lnTo>
-                    <a:pt x="3366258" y="1939862"/>
-                  </a:lnTo>
-                  <a:lnTo>
-                    <a:pt x="3437881" y="1994047"/>
-                  </a:lnTo>
-                  <a:lnTo>
-                    <a:pt x="3509503" y="2046330"/>
-                  </a:lnTo>
-                  <a:lnTo>
-                    <a:pt x="3581126" y="2096779"/>
-                  </a:lnTo>
-                  <a:lnTo>
-                    <a:pt x="3652748" y="2145456"/>
-                  </a:lnTo>
-                  <a:lnTo>
-                    <a:pt x="3724371" y="2192425"/>
-                  </a:lnTo>
-                  <a:lnTo>
-                    <a:pt x="3795993" y="2237746"/>
-                  </a:lnTo>
-                  <a:lnTo>
-                    <a:pt x="3867616" y="2281476"/>
-                  </a:lnTo>
-                  <a:lnTo>
-                    <a:pt x="3939238" y="2323672"/>
-                  </a:lnTo>
-                  <a:lnTo>
-                    <a:pt x="4010861" y="2364386"/>
-                  </a:lnTo>
-                  <a:lnTo>
-                    <a:pt x="4082483" y="2403672"/>
-                  </a:lnTo>
-                  <a:lnTo>
-                    <a:pt x="4154106" y="2441579"/>
-                  </a:lnTo>
-                  <a:lnTo>
-                    <a:pt x="4225729" y="2478155"/>
-                  </a:lnTo>
-                  <a:lnTo>
-                    <a:pt x="4297351" y="2513448"/>
-                  </a:lnTo>
-                  <a:lnTo>
-                    <a:pt x="4368974" y="2547502"/>
-                  </a:lnTo>
-                  <a:lnTo>
-                    <a:pt x="4440596" y="2580361"/>
-                  </a:lnTo>
-                  <a:lnTo>
-                    <a:pt x="4512219" y="2612066"/>
-                  </a:lnTo>
-                  <a:lnTo>
-                    <a:pt x="4583841" y="2642659"/>
-                  </a:lnTo>
-                  <a:lnTo>
-                    <a:pt x="4655464" y="2654202"/>
-                  </a:lnTo>
-                  <a:lnTo>
-                    <a:pt x="4727086" y="2654071"/>
-                  </a:lnTo>
-                  <a:lnTo>
-                    <a:pt x="4798709" y="2653939"/>
-                  </a:lnTo>
-                  <a:lnTo>
-                    <a:pt x="4870331" y="2653807"/>
-                  </a:lnTo>
-                  <a:lnTo>
-                    <a:pt x="4941954" y="2653675"/>
-                  </a:lnTo>
-                  <a:lnTo>
-                    <a:pt x="5013576" y="2653544"/>
-                  </a:lnTo>
-                  <a:lnTo>
-                    <a:pt x="5085199" y="2653412"/>
-                  </a:lnTo>
-                  <a:lnTo>
-                    <a:pt x="5156821" y="2653280"/>
-                  </a:lnTo>
-                  <a:lnTo>
-                    <a:pt x="5228444" y="2653148"/>
-                  </a:lnTo>
-                  <a:lnTo>
-                    <a:pt x="5300066" y="2653016"/>
-                  </a:lnTo>
-                  <a:lnTo>
-                    <a:pt x="5371689" y="2652884"/>
-                  </a:lnTo>
-                  <a:lnTo>
-                    <a:pt x="5443311" y="2652752"/>
-                  </a:lnTo>
-                  <a:lnTo>
-                    <a:pt x="5514934" y="2652620"/>
-                  </a:lnTo>
-                  <a:lnTo>
-                    <a:pt x="5586557" y="2652488"/>
-                  </a:lnTo>
-                  <a:lnTo>
-                    <a:pt x="5658179" y="2652356"/>
-                  </a:lnTo>
-                  <a:lnTo>
-                    <a:pt x="5729802" y="2652224"/>
-                  </a:lnTo>
-                  <a:lnTo>
-                    <a:pt x="5801424" y="2652092"/>
-                  </a:lnTo>
-                  <a:lnTo>
-                    <a:pt x="5873047" y="2651960"/>
-                  </a:lnTo>
-                  <a:lnTo>
-                    <a:pt x="5944669" y="2651828"/>
-                  </a:lnTo>
-                  <a:lnTo>
-                    <a:pt x="6016292" y="2651696"/>
-                  </a:lnTo>
-                  <a:lnTo>
-                    <a:pt x="6087914" y="2651564"/>
-                  </a:lnTo>
-                  <a:lnTo>
-                    <a:pt x="6159537" y="2651432"/>
-                  </a:lnTo>
-                  <a:lnTo>
-                    <a:pt x="6231159" y="2651300"/>
-                  </a:lnTo>
-                  <a:lnTo>
-                    <a:pt x="6302782" y="2651167"/>
-                  </a:lnTo>
-                  <a:lnTo>
-                    <a:pt x="6374404" y="2651035"/>
-                  </a:lnTo>
-                  <a:lnTo>
-                    <a:pt x="6446027" y="2650903"/>
-                  </a:lnTo>
-                  <a:lnTo>
-                    <a:pt x="6517649" y="2650771"/>
-                  </a:lnTo>
-                  <a:lnTo>
-                    <a:pt x="6589272" y="2650638"/>
-                  </a:lnTo>
-                  <a:lnTo>
-                    <a:pt x="6660894" y="2650506"/>
-                  </a:lnTo>
-                  <a:lnTo>
-                    <a:pt x="6732517" y="2650374"/>
-                  </a:lnTo>
-                  <a:lnTo>
-                    <a:pt x="6804139" y="2650241"/>
-                  </a:lnTo>
-                  <a:lnTo>
-                    <a:pt x="6875762" y="2650109"/>
-                  </a:lnTo>
-                  <a:lnTo>
-                    <a:pt x="6947385" y="2649977"/>
-                  </a:lnTo>
-                  <a:lnTo>
-                    <a:pt x="7019007" y="2649844"/>
-                  </a:lnTo>
-                  <a:lnTo>
-                    <a:pt x="7090630" y="2649712"/>
-                  </a:lnTo>
-                  <a:lnTo>
-                    <a:pt x="7090630" y="3242879"/>
-                  </a:lnTo>
-                  <a:lnTo>
-                    <a:pt x="7019007" y="3234118"/>
-                  </a:lnTo>
-                  <a:lnTo>
-                    <a:pt x="6947385" y="3225038"/>
-                  </a:lnTo>
-                  <a:lnTo>
-                    <a:pt x="6875762" y="3215628"/>
-                  </a:lnTo>
-                  <a:lnTo>
-                    <a:pt x="6804139" y="3205876"/>
-                  </a:lnTo>
-                  <a:lnTo>
-                    <a:pt x="6732517" y="3195769"/>
-                  </a:lnTo>
-                  <a:lnTo>
-                    <a:pt x="6660894" y="3185294"/>
-                  </a:lnTo>
-                  <a:lnTo>
-                    <a:pt x="6589272" y="3174439"/>
-                  </a:lnTo>
-                  <a:lnTo>
-                    <a:pt x="6517649" y="3163188"/>
-                  </a:lnTo>
-                  <a:lnTo>
-                    <a:pt x="6446027" y="3151529"/>
-                  </a:lnTo>
-                  <a:lnTo>
-                    <a:pt x="6374404" y="3139445"/>
-                  </a:lnTo>
-                  <a:lnTo>
-                    <a:pt x="6302782" y="3126922"/>
-                  </a:lnTo>
-                  <a:lnTo>
-                    <a:pt x="6231159" y="3113943"/>
-                  </a:lnTo>
-                  <a:lnTo>
-                    <a:pt x="6159537" y="3100492"/>
-                  </a:lnTo>
-                  <a:lnTo>
-                    <a:pt x="6087914" y="3086552"/>
-                  </a:lnTo>
-                  <a:lnTo>
-                    <a:pt x="6016292" y="3072105"/>
-                  </a:lnTo>
-                  <a:lnTo>
-                    <a:pt x="5944669" y="3057132"/>
-                  </a:lnTo>
-                  <a:lnTo>
-                    <a:pt x="5873047" y="3041615"/>
-                  </a:lnTo>
-                  <a:lnTo>
-                    <a:pt x="5801424" y="3025533"/>
-                  </a:lnTo>
-                  <a:lnTo>
-                    <a:pt x="5729802" y="3008867"/>
-                  </a:lnTo>
-                  <a:lnTo>
-                    <a:pt x="5658179" y="2991594"/>
-                  </a:lnTo>
-                  <a:lnTo>
-                    <a:pt x="5586557" y="2973693"/>
-                  </a:lnTo>
-                  <a:lnTo>
-                    <a:pt x="5514934" y="2955141"/>
-                  </a:lnTo>
-                  <a:lnTo>
-                    <a:pt x="5443311" y="2935914"/>
-                  </a:lnTo>
-                  <a:lnTo>
-                    <a:pt x="5371689" y="2915987"/>
-                  </a:lnTo>
-                  <a:lnTo>
-                    <a:pt x="5300066" y="2895336"/>
-                  </a:lnTo>
-                  <a:lnTo>
-                    <a:pt x="5228444" y="2873934"/>
-                  </a:lnTo>
-                  <a:lnTo>
-                    <a:pt x="5156821" y="2851753"/>
-                  </a:lnTo>
-                  <a:lnTo>
-                    <a:pt x="5085199" y="2828766"/>
-                  </a:lnTo>
-                  <a:lnTo>
-                    <a:pt x="5013576" y="2804942"/>
-                  </a:lnTo>
-                  <a:lnTo>
-                    <a:pt x="4941954" y="2780252"/>
-                  </a:lnTo>
-                  <a:lnTo>
-                    <a:pt x="4870331" y="2754664"/>
-                  </a:lnTo>
-                  <a:lnTo>
-                    <a:pt x="4798709" y="2728145"/>
-                  </a:lnTo>
-                  <a:lnTo>
-                    <a:pt x="4727086" y="2700661"/>
-                  </a:lnTo>
-                  <a:lnTo>
-                    <a:pt x="4655464" y="2672178"/>
-                  </a:lnTo>
-                  <a:lnTo>
-                    <a:pt x="4583841" y="2654334"/>
-                  </a:lnTo>
-                  <a:lnTo>
-                    <a:pt x="4512219" y="2654466"/>
-                  </a:lnTo>
-                  <a:lnTo>
-                    <a:pt x="4440596" y="2654598"/>
-                  </a:lnTo>
-                  <a:lnTo>
-                    <a:pt x="4368974" y="2654729"/>
-                  </a:lnTo>
-                  <a:lnTo>
-                    <a:pt x="4297351" y="2654861"/>
-                  </a:lnTo>
-                  <a:lnTo>
-                    <a:pt x="4225729" y="2654992"/>
-                  </a:lnTo>
-                  <a:lnTo>
-                    <a:pt x="4154106" y="2655124"/>
-                  </a:lnTo>
-                  <a:lnTo>
-                    <a:pt x="4082483" y="2655256"/>
-                  </a:lnTo>
-                  <a:lnTo>
-                    <a:pt x="4010861" y="2655387"/>
-                  </a:lnTo>
-                  <a:lnTo>
-                    <a:pt x="3939238" y="2655519"/>
-                  </a:lnTo>
-                  <a:lnTo>
-                    <a:pt x="3867616" y="2655650"/>
-                  </a:lnTo>
-                  <a:lnTo>
-                    <a:pt x="3795993" y="2655782"/>
-                  </a:lnTo>
-                  <a:lnTo>
-                    <a:pt x="3724371" y="2655913"/>
-                  </a:lnTo>
-                  <a:lnTo>
-                    <a:pt x="3652748" y="2656044"/>
-                  </a:lnTo>
-                  <a:lnTo>
-                    <a:pt x="3581126" y="2656176"/>
-                  </a:lnTo>
-                  <a:lnTo>
-                    <a:pt x="3509503" y="2656307"/>
-                  </a:lnTo>
-                  <a:lnTo>
-                    <a:pt x="3437881" y="2656439"/>
-                  </a:lnTo>
-                  <a:lnTo>
-                    <a:pt x="3366258" y="2656570"/>
-                  </a:lnTo>
-                  <a:lnTo>
-                    <a:pt x="3294636" y="2656701"/>
-                  </a:lnTo>
-                  <a:lnTo>
-                    <a:pt x="3223013" y="2656833"/>
-                  </a:lnTo>
-                  <a:lnTo>
-                    <a:pt x="3151391" y="2656964"/>
-                  </a:lnTo>
-                  <a:lnTo>
-                    <a:pt x="3079768" y="2657095"/>
-                  </a:lnTo>
-                  <a:lnTo>
-                    <a:pt x="3008146" y="2657226"/>
-                  </a:lnTo>
-                  <a:lnTo>
-                    <a:pt x="2936523" y="2657358"/>
-                  </a:lnTo>
-                  <a:lnTo>
-                    <a:pt x="2864901" y="2657489"/>
-                  </a:lnTo>
-                  <a:lnTo>
-                    <a:pt x="2793278" y="2657620"/>
-                  </a:lnTo>
-                  <a:lnTo>
-                    <a:pt x="2721655" y="2657751"/>
-                  </a:lnTo>
-                  <a:lnTo>
-                    <a:pt x="2650033" y="2657882"/>
-                  </a:lnTo>
-                  <a:lnTo>
-                    <a:pt x="2578410" y="2658014"/>
-                  </a:lnTo>
-                  <a:lnTo>
-                    <a:pt x="2506788" y="2658145"/>
-                  </a:lnTo>
-                  <a:lnTo>
-                    <a:pt x="2435165" y="2658276"/>
-                  </a:lnTo>
-                  <a:lnTo>
-                    <a:pt x="2363543" y="2658407"/>
-                  </a:lnTo>
-                  <a:lnTo>
-                    <a:pt x="2291920" y="2658538"/>
-                  </a:lnTo>
-                  <a:lnTo>
-                    <a:pt x="2220298" y="2658669"/>
-                  </a:lnTo>
-                  <a:lnTo>
-                    <a:pt x="2148675" y="2658800"/>
-                  </a:lnTo>
-                  <a:lnTo>
-                    <a:pt x="2077053" y="2658931"/>
-                  </a:lnTo>
-                  <a:lnTo>
-                    <a:pt x="2005430" y="2659062"/>
-                  </a:lnTo>
-                  <a:lnTo>
-                    <a:pt x="1933808" y="2659193"/>
-                  </a:lnTo>
-                  <a:lnTo>
-                    <a:pt x="1862185" y="2659324"/>
-                  </a:lnTo>
-                  <a:lnTo>
-                    <a:pt x="1790563" y="2659455"/>
-                  </a:lnTo>
-                  <a:lnTo>
-                    <a:pt x="1718940" y="2659585"/>
-                  </a:lnTo>
-                  <a:lnTo>
-                    <a:pt x="1647318" y="2659716"/>
-                  </a:lnTo>
-                  <a:lnTo>
-                    <a:pt x="1575695" y="2659847"/>
-                  </a:lnTo>
-                  <a:lnTo>
-                    <a:pt x="1504073" y="2659978"/>
-                  </a:lnTo>
-                  <a:lnTo>
-                    <a:pt x="1432450" y="2660109"/>
-                  </a:lnTo>
-                  <a:lnTo>
-                    <a:pt x="1360827" y="2660239"/>
-                  </a:lnTo>
-                  <a:lnTo>
-                    <a:pt x="1289205" y="2660370"/>
-                  </a:lnTo>
-                  <a:lnTo>
-                    <a:pt x="1217582" y="2660501"/>
-                  </a:lnTo>
-                  <a:lnTo>
-                    <a:pt x="1145960" y="2660632"/>
-                  </a:lnTo>
-                  <a:lnTo>
-                    <a:pt x="1074337" y="2660762"/>
-                  </a:lnTo>
-                  <a:lnTo>
-                    <a:pt x="1002715" y="2660893"/>
-                  </a:lnTo>
-                  <a:lnTo>
-                    <a:pt x="931092" y="2661024"/>
-                  </a:lnTo>
-                  <a:lnTo>
-                    <a:pt x="859470" y="2661154"/>
-                  </a:lnTo>
-                  <a:lnTo>
-                    <a:pt x="787847" y="2661285"/>
-                  </a:lnTo>
-                  <a:lnTo>
-                    <a:pt x="716225" y="2661415"/>
-                  </a:lnTo>
-                  <a:lnTo>
-                    <a:pt x="644602" y="2661546"/>
-                  </a:lnTo>
-                  <a:lnTo>
-                    <a:pt x="572980" y="2661677"/>
-                  </a:lnTo>
-                  <a:lnTo>
-                    <a:pt x="501357" y="2661807"/>
-                  </a:lnTo>
-                  <a:lnTo>
-                    <a:pt x="429735" y="2661938"/>
-                  </a:lnTo>
-                  <a:lnTo>
-                    <a:pt x="358112" y="2662068"/>
-                  </a:lnTo>
-                  <a:lnTo>
-                    <a:pt x="286490" y="2662199"/>
-                  </a:lnTo>
-                  <a:lnTo>
-                    <a:pt x="214867" y="2662329"/>
-                  </a:lnTo>
-                  <a:lnTo>
-                    <a:pt x="143245" y="2662459"/>
-                  </a:lnTo>
-                  <a:lnTo>
-                    <a:pt x="71622" y="2662590"/>
-                  </a:lnTo>
-                  <a:lnTo>
-                    <a:pt x="0" y="2662720"/>
+                    <a:pt x="1790563" y="63275"/>
+                  </a:lnTo>
+                  <a:lnTo>
+                    <a:pt x="1862185" y="183724"/>
+                  </a:lnTo>
+                  <a:lnTo>
+                    <a:pt x="1933808" y="299931"/>
+                  </a:lnTo>
+                  <a:lnTo>
+                    <a:pt x="2005430" y="412046"/>
+                  </a:lnTo>
+                  <a:lnTo>
+                    <a:pt x="2077053" y="520214"/>
+                  </a:lnTo>
+                  <a:lnTo>
+                    <a:pt x="2148675" y="624572"/>
+                  </a:lnTo>
+                  <a:lnTo>
+                    <a:pt x="2220298" y="725255"/>
+                  </a:lnTo>
+                  <a:lnTo>
+                    <a:pt x="2291920" y="822393"/>
+                  </a:lnTo>
+                  <a:lnTo>
+                    <a:pt x="2363543" y="916111"/>
+                  </a:lnTo>
+                  <a:lnTo>
+                    <a:pt x="2435165" y="1006528"/>
+                  </a:lnTo>
+                  <a:lnTo>
+                    <a:pt x="2506788" y="1093761"/>
+                  </a:lnTo>
+                  <a:lnTo>
+                    <a:pt x="2578410" y="1177922"/>
+                  </a:lnTo>
+                  <a:lnTo>
+                    <a:pt x="2650033" y="1259120"/>
+                  </a:lnTo>
+                  <a:lnTo>
+                    <a:pt x="2721655" y="1337458"/>
+                  </a:lnTo>
+                  <a:lnTo>
+                    <a:pt x="2793278" y="1413038"/>
+                  </a:lnTo>
+                  <a:lnTo>
+                    <a:pt x="2864901" y="1485956"/>
+                  </a:lnTo>
+                  <a:lnTo>
+                    <a:pt x="2936523" y="1556307"/>
+                  </a:lnTo>
+                  <a:lnTo>
+                    <a:pt x="3008146" y="1624180"/>
+                  </a:lnTo>
+                  <a:lnTo>
+                    <a:pt x="3079768" y="1689663"/>
+                  </a:lnTo>
+                  <a:lnTo>
+                    <a:pt x="3151391" y="1752840"/>
+                  </a:lnTo>
+                  <a:lnTo>
+                    <a:pt x="3223013" y="1813792"/>
+                  </a:lnTo>
+                  <a:lnTo>
+                    <a:pt x="3294636" y="1872598"/>
+                  </a:lnTo>
+                  <a:lnTo>
+                    <a:pt x="3366258" y="1929334"/>
+                  </a:lnTo>
+                  <a:lnTo>
+                    <a:pt x="3437881" y="1984071"/>
+                  </a:lnTo>
+                  <a:lnTo>
+                    <a:pt x="3509503" y="2036881"/>
+                  </a:lnTo>
+                  <a:lnTo>
+                    <a:pt x="3581126" y="2087831"/>
+                  </a:lnTo>
+                  <a:lnTo>
+                    <a:pt x="3652748" y="2136987"/>
+                  </a:lnTo>
+                  <a:lnTo>
+                    <a:pt x="3724371" y="2184412"/>
+                  </a:lnTo>
+                  <a:lnTo>
+                    <a:pt x="3795993" y="2230167"/>
+                  </a:lnTo>
+                  <a:lnTo>
+                    <a:pt x="3867616" y="2274311"/>
+                  </a:lnTo>
+                  <a:lnTo>
+                    <a:pt x="3939238" y="2316900"/>
+                  </a:lnTo>
+                  <a:lnTo>
+                    <a:pt x="4010861" y="2357989"/>
+                  </a:lnTo>
+                  <a:lnTo>
+                    <a:pt x="4082483" y="2397632"/>
+                  </a:lnTo>
+                  <a:lnTo>
+                    <a:pt x="4154106" y="2435878"/>
+                  </a:lnTo>
+                  <a:lnTo>
+                    <a:pt x="4225729" y="2472778"/>
+                  </a:lnTo>
+                  <a:lnTo>
+                    <a:pt x="4297351" y="2508379"/>
+                  </a:lnTo>
+                  <a:lnTo>
+                    <a:pt x="4368974" y="2542725"/>
+                  </a:lnTo>
+                  <a:lnTo>
+                    <a:pt x="4440596" y="2575863"/>
+                  </a:lnTo>
+                  <a:lnTo>
+                    <a:pt x="4512219" y="2607833"/>
+                  </a:lnTo>
+                  <a:lnTo>
+                    <a:pt x="4583841" y="2638678"/>
+                  </a:lnTo>
+                  <a:lnTo>
+                    <a:pt x="4655464" y="2654102"/>
+                  </a:lnTo>
+                  <a:lnTo>
+                    <a:pt x="4727086" y="2653726"/>
+                  </a:lnTo>
+                  <a:lnTo>
+                    <a:pt x="4798709" y="2653350"/>
+                  </a:lnTo>
+                  <a:lnTo>
+                    <a:pt x="4870331" y="2652974"/>
+                  </a:lnTo>
+                  <a:lnTo>
+                    <a:pt x="4941954" y="2652597"/>
+                  </a:lnTo>
+                  <a:lnTo>
+                    <a:pt x="5013576" y="2652220"/>
+                  </a:lnTo>
+                  <a:lnTo>
+                    <a:pt x="5085199" y="2651843"/>
+                  </a:lnTo>
+                  <a:lnTo>
+                    <a:pt x="5156821" y="2651466"/>
+                  </a:lnTo>
+                  <a:lnTo>
+                    <a:pt x="5228444" y="2651089"/>
+                  </a:lnTo>
+                  <a:lnTo>
+                    <a:pt x="5300066" y="2650712"/>
+                  </a:lnTo>
+                  <a:lnTo>
+                    <a:pt x="5371689" y="2650334"/>
+                  </a:lnTo>
+                  <a:lnTo>
+                    <a:pt x="5443311" y="2649956"/>
+                  </a:lnTo>
+                  <a:lnTo>
+                    <a:pt x="5514934" y="2649578"/>
+                  </a:lnTo>
+                  <a:lnTo>
+                    <a:pt x="5586557" y="2649200"/>
+                  </a:lnTo>
+                  <a:lnTo>
+                    <a:pt x="5658179" y="2648822"/>
+                  </a:lnTo>
+                  <a:lnTo>
+                    <a:pt x="5729802" y="2648444"/>
+                  </a:lnTo>
+                  <a:lnTo>
+                    <a:pt x="5801424" y="2648065"/>
+                  </a:lnTo>
+                  <a:lnTo>
+                    <a:pt x="5873047" y="2647686"/>
+                  </a:lnTo>
+                  <a:lnTo>
+                    <a:pt x="5944669" y="2647307"/>
+                  </a:lnTo>
+                  <a:lnTo>
+                    <a:pt x="6016292" y="2646928"/>
+                  </a:lnTo>
+                  <a:lnTo>
+                    <a:pt x="6087914" y="2646549"/>
+                  </a:lnTo>
+                  <a:lnTo>
+                    <a:pt x="6159537" y="2646169"/>
+                  </a:lnTo>
+                  <a:lnTo>
+                    <a:pt x="6231159" y="2645790"/>
+                  </a:lnTo>
+                  <a:lnTo>
+                    <a:pt x="6302782" y="2645410"/>
+                  </a:lnTo>
+                  <a:lnTo>
+                    <a:pt x="6374404" y="2645030"/>
+                  </a:lnTo>
+                  <a:lnTo>
+                    <a:pt x="6446027" y="2644650"/>
+                  </a:lnTo>
+                  <a:lnTo>
+                    <a:pt x="6517649" y="2644269"/>
+                  </a:lnTo>
+                  <a:lnTo>
+                    <a:pt x="6589272" y="2643889"/>
+                  </a:lnTo>
+                  <a:lnTo>
+                    <a:pt x="6660894" y="2643508"/>
+                  </a:lnTo>
+                  <a:lnTo>
+                    <a:pt x="6732517" y="2643127"/>
+                  </a:lnTo>
+                  <a:lnTo>
+                    <a:pt x="6804139" y="2642746"/>
+                  </a:lnTo>
+                  <a:lnTo>
+                    <a:pt x="6875762" y="2642365"/>
+                  </a:lnTo>
+                  <a:lnTo>
+                    <a:pt x="6947385" y="2641984"/>
+                  </a:lnTo>
+                  <a:lnTo>
+                    <a:pt x="7019007" y="2641602"/>
+                  </a:lnTo>
+                  <a:lnTo>
+                    <a:pt x="7090630" y="2641220"/>
+                  </a:lnTo>
+                  <a:lnTo>
+                    <a:pt x="7090630" y="3242770"/>
+                  </a:lnTo>
+                  <a:lnTo>
+                    <a:pt x="7019007" y="3233975"/>
+                  </a:lnTo>
+                  <a:lnTo>
+                    <a:pt x="6947385" y="3224858"/>
+                  </a:lnTo>
+                  <a:lnTo>
+                    <a:pt x="6875762" y="3215409"/>
+                  </a:lnTo>
+                  <a:lnTo>
+                    <a:pt x="6804139" y="3205615"/>
+                  </a:lnTo>
+                  <a:lnTo>
+                    <a:pt x="6732517" y="3195463"/>
+                  </a:lnTo>
+                  <a:lnTo>
+                    <a:pt x="6660894" y="3184941"/>
+                  </a:lnTo>
+                  <a:lnTo>
+                    <a:pt x="6589272" y="3174034"/>
+                  </a:lnTo>
+                  <a:lnTo>
+                    <a:pt x="6517649" y="3162730"/>
+                  </a:lnTo>
+                  <a:lnTo>
+                    <a:pt x="6446027" y="3151013"/>
+                  </a:lnTo>
+                  <a:lnTo>
+                    <a:pt x="6374404" y="3138869"/>
+                  </a:lnTo>
+                  <a:lnTo>
+                    <a:pt x="6302782" y="3126281"/>
+                  </a:lnTo>
+                  <a:lnTo>
+                    <a:pt x="6231159" y="3113233"/>
+                  </a:lnTo>
+                  <a:lnTo>
+                    <a:pt x="6159537" y="3099710"/>
+                  </a:lnTo>
+                  <a:lnTo>
+                    <a:pt x="6087914" y="3085693"/>
+                  </a:lnTo>
+                  <a:lnTo>
+                    <a:pt x="6016292" y="3071164"/>
+                  </a:lnTo>
+                  <a:lnTo>
+                    <a:pt x="5944669" y="3056105"/>
+                  </a:lnTo>
+                  <a:lnTo>
+                    <a:pt x="5873047" y="3040496"/>
+                  </a:lnTo>
+                  <a:lnTo>
+                    <a:pt x="5801424" y="3024318"/>
+                  </a:lnTo>
+                  <a:lnTo>
+                    <a:pt x="5729802" y="3007549"/>
+                  </a:lnTo>
+                  <a:lnTo>
+                    <a:pt x="5658179" y="2990168"/>
+                  </a:lnTo>
+                  <a:lnTo>
+                    <a:pt x="5586557" y="2972153"/>
+                  </a:lnTo>
+                  <a:lnTo>
+                    <a:pt x="5514934" y="2953480"/>
+                  </a:lnTo>
+                  <a:lnTo>
+                    <a:pt x="5443311" y="2934126"/>
+                  </a:lnTo>
+                  <a:lnTo>
+                    <a:pt x="5371689" y="2914065"/>
+                  </a:lnTo>
+                  <a:lnTo>
+                    <a:pt x="5300066" y="2893272"/>
+                  </a:lnTo>
+                  <a:lnTo>
+                    <a:pt x="5228444" y="2871720"/>
+                  </a:lnTo>
+                  <a:lnTo>
+                    <a:pt x="5156821" y="2849381"/>
+                  </a:lnTo>
+                  <a:lnTo>
+                    <a:pt x="5085199" y="2826227"/>
+                  </a:lnTo>
+                  <a:lnTo>
+                    <a:pt x="5013576" y="2802228"/>
+                  </a:lnTo>
+                  <a:lnTo>
+                    <a:pt x="4941954" y="2777353"/>
+                  </a:lnTo>
+                  <a:lnTo>
+                    <a:pt x="4870331" y="2751570"/>
+                  </a:lnTo>
+                  <a:lnTo>
+                    <a:pt x="4798709" y="2724846"/>
+                  </a:lnTo>
+                  <a:lnTo>
+                    <a:pt x="4727086" y="2697146"/>
+                  </a:lnTo>
+                  <a:lnTo>
+                    <a:pt x="4655464" y="2668436"/>
+                  </a:lnTo>
+                  <a:lnTo>
+                    <a:pt x="4583841" y="2654478"/>
+                  </a:lnTo>
+                  <a:lnTo>
+                    <a:pt x="4512219" y="2654854"/>
+                  </a:lnTo>
+                  <a:lnTo>
+                    <a:pt x="4440596" y="2655230"/>
+                  </a:lnTo>
+                  <a:lnTo>
+                    <a:pt x="4368974" y="2655605"/>
+                  </a:lnTo>
+                  <a:lnTo>
+                    <a:pt x="4297351" y="2655980"/>
+                  </a:lnTo>
+                  <a:lnTo>
+                    <a:pt x="4225729" y="2656355"/>
+                  </a:lnTo>
+                  <a:lnTo>
+                    <a:pt x="4154106" y="2656730"/>
+                  </a:lnTo>
+                  <a:lnTo>
+                    <a:pt x="4082483" y="2657105"/>
+                  </a:lnTo>
+                  <a:lnTo>
+                    <a:pt x="4010861" y="2657479"/>
+                  </a:lnTo>
+                  <a:lnTo>
+                    <a:pt x="3939238" y="2657854"/>
+                  </a:lnTo>
+                  <a:lnTo>
+                    <a:pt x="3867616" y="2658228"/>
+                  </a:lnTo>
+                  <a:lnTo>
+                    <a:pt x="3795993" y="2658602"/>
+                  </a:lnTo>
+                  <a:lnTo>
+                    <a:pt x="3724371" y="2658976"/>
+                  </a:lnTo>
+                  <a:lnTo>
+                    <a:pt x="3652748" y="2659349"/>
+                  </a:lnTo>
+                  <a:lnTo>
+                    <a:pt x="3581126" y="2659723"/>
+                  </a:lnTo>
+                  <a:lnTo>
+                    <a:pt x="3509503" y="2660096"/>
+                  </a:lnTo>
+                  <a:lnTo>
+                    <a:pt x="3437881" y="2660469"/>
+                  </a:lnTo>
+                  <a:lnTo>
+                    <a:pt x="3366258" y="2660842"/>
+                  </a:lnTo>
+                  <a:lnTo>
+                    <a:pt x="3294636" y="2661215"/>
+                  </a:lnTo>
+                  <a:lnTo>
+                    <a:pt x="3223013" y="2661588"/>
+                  </a:lnTo>
+                  <a:lnTo>
+                    <a:pt x="3151391" y="2661960"/>
+                  </a:lnTo>
+                  <a:lnTo>
+                    <a:pt x="3079768" y="2662333"/>
+                  </a:lnTo>
+                  <a:lnTo>
+                    <a:pt x="3008146" y="2662705"/>
+                  </a:lnTo>
+                  <a:lnTo>
+                    <a:pt x="2936523" y="2663077"/>
+                  </a:lnTo>
+                  <a:lnTo>
+                    <a:pt x="2864901" y="2663449"/>
+                  </a:lnTo>
+                  <a:lnTo>
+                    <a:pt x="2793278" y="2663820"/>
+                  </a:lnTo>
+                  <a:lnTo>
+                    <a:pt x="2721655" y="2664192"/>
+                  </a:lnTo>
+                  <a:lnTo>
+                    <a:pt x="2650033" y="2664563"/>
+                  </a:lnTo>
+                  <a:lnTo>
+                    <a:pt x="2578410" y="2664934"/>
+                  </a:lnTo>
+                  <a:lnTo>
+                    <a:pt x="2506788" y="2665305"/>
+                  </a:lnTo>
+                  <a:lnTo>
+                    <a:pt x="2435165" y="2665676"/>
+                  </a:lnTo>
+                  <a:lnTo>
+                    <a:pt x="2363543" y="2666047"/>
+                  </a:lnTo>
+                  <a:lnTo>
+                    <a:pt x="2291920" y="2666417"/>
+                  </a:lnTo>
+                  <a:lnTo>
+                    <a:pt x="2220298" y="2666787"/>
+                  </a:lnTo>
+                  <a:lnTo>
+                    <a:pt x="2148675" y="2667158"/>
+                  </a:lnTo>
+                  <a:lnTo>
+                    <a:pt x="2077053" y="2667528"/>
+                  </a:lnTo>
+                  <a:lnTo>
+                    <a:pt x="2005430" y="2667897"/>
+                  </a:lnTo>
+                  <a:lnTo>
+                    <a:pt x="1933808" y="2668267"/>
+                  </a:lnTo>
+                  <a:lnTo>
+                    <a:pt x="1862185" y="2668636"/>
+                  </a:lnTo>
+                  <a:lnTo>
+                    <a:pt x="1790563" y="2669006"/>
+                  </a:lnTo>
+                  <a:lnTo>
+                    <a:pt x="1718940" y="2669375"/>
+                  </a:lnTo>
+                  <a:lnTo>
+                    <a:pt x="1647318" y="2669744"/>
+                  </a:lnTo>
+                  <a:lnTo>
+                    <a:pt x="1575695" y="2670113"/>
+                  </a:lnTo>
+                  <a:lnTo>
+                    <a:pt x="1504073" y="2670481"/>
+                  </a:lnTo>
+                  <a:lnTo>
+                    <a:pt x="1432450" y="2670850"/>
+                  </a:lnTo>
+                  <a:lnTo>
+                    <a:pt x="1360827" y="2671218"/>
+                  </a:lnTo>
+                  <a:lnTo>
+                    <a:pt x="1289205" y="2671586"/>
+                  </a:lnTo>
+                  <a:lnTo>
+                    <a:pt x="1217582" y="2671954"/>
+                  </a:lnTo>
+                  <a:lnTo>
+                    <a:pt x="1145960" y="2672322"/>
+                  </a:lnTo>
+                  <a:lnTo>
+                    <a:pt x="1074337" y="2672690"/>
+                  </a:lnTo>
+                  <a:lnTo>
+                    <a:pt x="1002715" y="2673057"/>
+                  </a:lnTo>
+                  <a:lnTo>
+                    <a:pt x="931092" y="2673424"/>
+                  </a:lnTo>
+                  <a:lnTo>
+                    <a:pt x="859470" y="2673791"/>
+                  </a:lnTo>
+                  <a:lnTo>
+                    <a:pt x="787847" y="2674158"/>
+                  </a:lnTo>
+                  <a:lnTo>
+                    <a:pt x="716225" y="2674525"/>
+                  </a:lnTo>
+                  <a:lnTo>
+                    <a:pt x="644602" y="2674892"/>
+                  </a:lnTo>
+                  <a:lnTo>
+                    <a:pt x="572980" y="2675258"/>
+                  </a:lnTo>
+                  <a:lnTo>
+                    <a:pt x="501357" y="2675625"/>
+                  </a:lnTo>
+                  <a:lnTo>
+                    <a:pt x="429735" y="2675991"/>
+                  </a:lnTo>
+                  <a:lnTo>
+                    <a:pt x="358112" y="2676357"/>
+                  </a:lnTo>
+                  <a:lnTo>
+                    <a:pt x="286490" y="2676723"/>
+                  </a:lnTo>
+                  <a:lnTo>
+                    <a:pt x="214867" y="2677088"/>
+                  </a:lnTo>
+                  <a:lnTo>
+                    <a:pt x="143245" y="2677454"/>
+                  </a:lnTo>
+                  <a:lnTo>
+                    <a:pt x="71622" y="2677819"/>
+                  </a:lnTo>
+                  <a:lnTo>
+                    <a:pt x="0" y="2678184"/>
                   </a:lnTo>
                   <a:close/>
                 </a:path>
@@ -3475,240 +3475,240 @@
           </p:nvSpPr>
           <p:spPr>
             <a:xfrm>
-              <a:off x="2907081" y="2073503"/>
-              <a:ext cx="5355597" cy="2654202"/>
+              <a:off x="2926312" y="2073503"/>
+              <a:ext cx="5336367" cy="2654102"/>
             </a:xfrm>
             <a:custGeom>
               <a:avLst/>
               <a:pathLst>
-                <a:path w="5355597" h="2654202">
+                <a:path w="5336367" h="2654102">
                   <a:moveTo>
                     <a:pt x="0" y="0"/>
                   </a:moveTo>
                   <a:lnTo>
-                    <a:pt x="55530" y="95549"/>
-                  </a:lnTo>
-                  <a:lnTo>
-                    <a:pt x="127153" y="214463"/>
-                  </a:lnTo>
-                  <a:lnTo>
-                    <a:pt x="198775" y="329203"/>
-                  </a:lnTo>
-                  <a:lnTo>
-                    <a:pt x="270398" y="439916"/>
-                  </a:lnTo>
-                  <a:lnTo>
-                    <a:pt x="342020" y="546744"/>
-                  </a:lnTo>
-                  <a:lnTo>
-                    <a:pt x="413643" y="649822"/>
-                  </a:lnTo>
-                  <a:lnTo>
-                    <a:pt x="485265" y="749283"/>
-                  </a:lnTo>
-                  <a:lnTo>
-                    <a:pt x="556888" y="845253"/>
-                  </a:lnTo>
-                  <a:lnTo>
-                    <a:pt x="628510" y="937855"/>
-                  </a:lnTo>
-                  <a:lnTo>
-                    <a:pt x="700133" y="1027206"/>
-                  </a:lnTo>
-                  <a:lnTo>
-                    <a:pt x="771755" y="1113422"/>
-                  </a:lnTo>
-                  <a:lnTo>
-                    <a:pt x="843378" y="1196612"/>
-                  </a:lnTo>
-                  <a:lnTo>
-                    <a:pt x="915000" y="1276882"/>
-                  </a:lnTo>
-                  <a:lnTo>
-                    <a:pt x="986623" y="1354336"/>
-                  </a:lnTo>
-                  <a:lnTo>
-                    <a:pt x="1058245" y="1429070"/>
-                  </a:lnTo>
-                  <a:lnTo>
-                    <a:pt x="1129868" y="1501182"/>
-                  </a:lnTo>
-                  <a:lnTo>
-                    <a:pt x="1201490" y="1570763"/>
-                  </a:lnTo>
-                  <a:lnTo>
-                    <a:pt x="1273113" y="1637902"/>
-                  </a:lnTo>
-                  <a:lnTo>
-                    <a:pt x="1344736" y="1702684"/>
-                  </a:lnTo>
-                  <a:lnTo>
-                    <a:pt x="1416358" y="1765193"/>
-                  </a:lnTo>
-                  <a:lnTo>
-                    <a:pt x="1487981" y="1825509"/>
-                  </a:lnTo>
-                  <a:lnTo>
-                    <a:pt x="1559603" y="1883707"/>
-                  </a:lnTo>
-                  <a:lnTo>
-                    <a:pt x="1631226" y="1939862"/>
-                  </a:lnTo>
-                  <a:lnTo>
-                    <a:pt x="1702848" y="1994047"/>
-                  </a:lnTo>
-                  <a:lnTo>
-                    <a:pt x="1774471" y="2046330"/>
-                  </a:lnTo>
-                  <a:lnTo>
-                    <a:pt x="1846093" y="2096779"/>
-                  </a:lnTo>
-                  <a:lnTo>
-                    <a:pt x="1917716" y="2145456"/>
-                  </a:lnTo>
-                  <a:lnTo>
-                    <a:pt x="1989338" y="2192425"/>
-                  </a:lnTo>
-                  <a:lnTo>
-                    <a:pt x="2060961" y="2237746"/>
-                  </a:lnTo>
-                  <a:lnTo>
-                    <a:pt x="2132583" y="2281476"/>
-                  </a:lnTo>
-                  <a:lnTo>
-                    <a:pt x="2204206" y="2323672"/>
-                  </a:lnTo>
-                  <a:lnTo>
-                    <a:pt x="2275828" y="2364386"/>
-                  </a:lnTo>
-                  <a:lnTo>
-                    <a:pt x="2347451" y="2403672"/>
-                  </a:lnTo>
-                  <a:lnTo>
-                    <a:pt x="2419073" y="2441579"/>
-                  </a:lnTo>
-                  <a:lnTo>
-                    <a:pt x="2490696" y="2478155"/>
-                  </a:lnTo>
-                  <a:lnTo>
-                    <a:pt x="2562318" y="2513448"/>
-                  </a:lnTo>
-                  <a:lnTo>
-                    <a:pt x="2633941" y="2547502"/>
-                  </a:lnTo>
-                  <a:lnTo>
-                    <a:pt x="2705564" y="2580361"/>
-                  </a:lnTo>
-                  <a:lnTo>
-                    <a:pt x="2777186" y="2612066"/>
-                  </a:lnTo>
-                  <a:lnTo>
-                    <a:pt x="2848809" y="2642659"/>
-                  </a:lnTo>
-                  <a:lnTo>
-                    <a:pt x="2920431" y="2654202"/>
-                  </a:lnTo>
-                  <a:lnTo>
-                    <a:pt x="2992054" y="2654071"/>
-                  </a:lnTo>
-                  <a:lnTo>
-                    <a:pt x="3063676" y="2653939"/>
-                  </a:lnTo>
-                  <a:lnTo>
-                    <a:pt x="3135299" y="2653807"/>
-                  </a:lnTo>
-                  <a:lnTo>
-                    <a:pt x="3206921" y="2653675"/>
-                  </a:lnTo>
-                  <a:lnTo>
-                    <a:pt x="3278544" y="2653544"/>
-                  </a:lnTo>
-                  <a:lnTo>
-                    <a:pt x="3350166" y="2653412"/>
-                  </a:lnTo>
-                  <a:lnTo>
-                    <a:pt x="3421789" y="2653280"/>
-                  </a:lnTo>
-                  <a:lnTo>
-                    <a:pt x="3493411" y="2653148"/>
-                  </a:lnTo>
-                  <a:lnTo>
-                    <a:pt x="3565034" y="2653016"/>
-                  </a:lnTo>
-                  <a:lnTo>
-                    <a:pt x="3636656" y="2652884"/>
-                  </a:lnTo>
-                  <a:lnTo>
-                    <a:pt x="3708279" y="2652752"/>
-                  </a:lnTo>
-                  <a:lnTo>
-                    <a:pt x="3779901" y="2652620"/>
-                  </a:lnTo>
-                  <a:lnTo>
-                    <a:pt x="3851524" y="2652488"/>
-                  </a:lnTo>
-                  <a:lnTo>
-                    <a:pt x="3923146" y="2652356"/>
-                  </a:lnTo>
-                  <a:lnTo>
-                    <a:pt x="3994769" y="2652224"/>
-                  </a:lnTo>
-                  <a:lnTo>
-                    <a:pt x="4066392" y="2652092"/>
-                  </a:lnTo>
-                  <a:lnTo>
-                    <a:pt x="4138014" y="2651960"/>
-                  </a:lnTo>
-                  <a:lnTo>
-                    <a:pt x="4209637" y="2651828"/>
-                  </a:lnTo>
-                  <a:lnTo>
-                    <a:pt x="4281259" y="2651696"/>
-                  </a:lnTo>
-                  <a:lnTo>
-                    <a:pt x="4352882" y="2651564"/>
-                  </a:lnTo>
-                  <a:lnTo>
-                    <a:pt x="4424504" y="2651432"/>
-                  </a:lnTo>
-                  <a:lnTo>
-                    <a:pt x="4496127" y="2651300"/>
-                  </a:lnTo>
-                  <a:lnTo>
-                    <a:pt x="4567749" y="2651167"/>
-                  </a:lnTo>
-                  <a:lnTo>
-                    <a:pt x="4639372" y="2651035"/>
-                  </a:lnTo>
-                  <a:lnTo>
-                    <a:pt x="4710994" y="2650903"/>
-                  </a:lnTo>
-                  <a:lnTo>
-                    <a:pt x="4782617" y="2650771"/>
-                  </a:lnTo>
-                  <a:lnTo>
-                    <a:pt x="4854239" y="2650638"/>
-                  </a:lnTo>
-                  <a:lnTo>
-                    <a:pt x="4925862" y="2650506"/>
-                  </a:lnTo>
-                  <a:lnTo>
-                    <a:pt x="4997484" y="2650374"/>
-                  </a:lnTo>
-                  <a:lnTo>
-                    <a:pt x="5069107" y="2650241"/>
-                  </a:lnTo>
-                  <a:lnTo>
-                    <a:pt x="5140729" y="2650109"/>
-                  </a:lnTo>
-                  <a:lnTo>
-                    <a:pt x="5212352" y="2649977"/>
-                  </a:lnTo>
-                  <a:lnTo>
-                    <a:pt x="5283974" y="2649844"/>
-                  </a:lnTo>
-                  <a:lnTo>
-                    <a:pt x="5355597" y="2649712"/>
+                    <a:pt x="36300" y="63275"/>
+                  </a:lnTo>
+                  <a:lnTo>
+                    <a:pt x="107922" y="183724"/>
+                  </a:lnTo>
+                  <a:lnTo>
+                    <a:pt x="179545" y="299931"/>
+                  </a:lnTo>
+                  <a:lnTo>
+                    <a:pt x="251167" y="412046"/>
+                  </a:lnTo>
+                  <a:lnTo>
+                    <a:pt x="322790" y="520214"/>
+                  </a:lnTo>
+                  <a:lnTo>
+                    <a:pt x="394412" y="624572"/>
+                  </a:lnTo>
+                  <a:lnTo>
+                    <a:pt x="466035" y="725255"/>
+                  </a:lnTo>
+                  <a:lnTo>
+                    <a:pt x="537657" y="822393"/>
+                  </a:lnTo>
+                  <a:lnTo>
+                    <a:pt x="609280" y="916111"/>
+                  </a:lnTo>
+                  <a:lnTo>
+                    <a:pt x="680903" y="1006528"/>
+                  </a:lnTo>
+                  <a:lnTo>
+                    <a:pt x="752525" y="1093761"/>
+                  </a:lnTo>
+                  <a:lnTo>
+                    <a:pt x="824148" y="1177922"/>
+                  </a:lnTo>
+                  <a:lnTo>
+                    <a:pt x="895770" y="1259120"/>
+                  </a:lnTo>
+                  <a:lnTo>
+                    <a:pt x="967393" y="1337458"/>
+                  </a:lnTo>
+                  <a:lnTo>
+                    <a:pt x="1039015" y="1413038"/>
+                  </a:lnTo>
+                  <a:lnTo>
+                    <a:pt x="1110638" y="1485956"/>
+                  </a:lnTo>
+                  <a:lnTo>
+                    <a:pt x="1182260" y="1556307"/>
+                  </a:lnTo>
+                  <a:lnTo>
+                    <a:pt x="1253883" y="1624180"/>
+                  </a:lnTo>
+                  <a:lnTo>
+                    <a:pt x="1325505" y="1689663"/>
+                  </a:lnTo>
+                  <a:lnTo>
+                    <a:pt x="1397128" y="1752840"/>
+                  </a:lnTo>
+                  <a:lnTo>
+                    <a:pt x="1468750" y="1813792"/>
+                  </a:lnTo>
+                  <a:lnTo>
+                    <a:pt x="1540373" y="1872598"/>
+                  </a:lnTo>
+                  <a:lnTo>
+                    <a:pt x="1611995" y="1929334"/>
+                  </a:lnTo>
+                  <a:lnTo>
+                    <a:pt x="1683618" y="1984071"/>
+                  </a:lnTo>
+                  <a:lnTo>
+                    <a:pt x="1755240" y="2036881"/>
+                  </a:lnTo>
+                  <a:lnTo>
+                    <a:pt x="1826863" y="2087831"/>
+                  </a:lnTo>
+                  <a:lnTo>
+                    <a:pt x="1898485" y="2136987"/>
+                  </a:lnTo>
+                  <a:lnTo>
+                    <a:pt x="1970108" y="2184412"/>
+                  </a:lnTo>
+                  <a:lnTo>
+                    <a:pt x="2041731" y="2230167"/>
+                  </a:lnTo>
+                  <a:lnTo>
+                    <a:pt x="2113353" y="2274311"/>
+                  </a:lnTo>
+                  <a:lnTo>
+                    <a:pt x="2184976" y="2316900"/>
+                  </a:lnTo>
+                  <a:lnTo>
+                    <a:pt x="2256598" y="2357989"/>
+                  </a:lnTo>
+                  <a:lnTo>
+                    <a:pt x="2328221" y="2397632"/>
+                  </a:lnTo>
+                  <a:lnTo>
+                    <a:pt x="2399843" y="2435878"/>
+                  </a:lnTo>
+                  <a:lnTo>
+                    <a:pt x="2471466" y="2472778"/>
+                  </a:lnTo>
+                  <a:lnTo>
+                    <a:pt x="2543088" y="2508379"/>
+                  </a:lnTo>
+                  <a:lnTo>
+                    <a:pt x="2614711" y="2542725"/>
+                  </a:lnTo>
+                  <a:lnTo>
+                    <a:pt x="2686333" y="2575863"/>
+                  </a:lnTo>
+                  <a:lnTo>
+                    <a:pt x="2757956" y="2607833"/>
+                  </a:lnTo>
+                  <a:lnTo>
+                    <a:pt x="2829578" y="2638678"/>
+                  </a:lnTo>
+                  <a:lnTo>
+                    <a:pt x="2901201" y="2654102"/>
+                  </a:lnTo>
+                  <a:lnTo>
+                    <a:pt x="2972823" y="2653726"/>
+                  </a:lnTo>
+                  <a:lnTo>
+                    <a:pt x="3044446" y="2653350"/>
+                  </a:lnTo>
+                  <a:lnTo>
+                    <a:pt x="3116068" y="2652974"/>
+                  </a:lnTo>
+                  <a:lnTo>
+                    <a:pt x="3187691" y="2652597"/>
+                  </a:lnTo>
+                  <a:lnTo>
+                    <a:pt x="3259313" y="2652220"/>
+                  </a:lnTo>
+                  <a:lnTo>
+                    <a:pt x="3330936" y="2651843"/>
+                  </a:lnTo>
+                  <a:lnTo>
+                    <a:pt x="3402558" y="2651466"/>
+                  </a:lnTo>
+                  <a:lnTo>
+                    <a:pt x="3474181" y="2651089"/>
+                  </a:lnTo>
+                  <a:lnTo>
+                    <a:pt x="3545804" y="2650712"/>
+                  </a:lnTo>
+                  <a:lnTo>
+                    <a:pt x="3617426" y="2650334"/>
+                  </a:lnTo>
+                  <a:lnTo>
+                    <a:pt x="3689049" y="2649956"/>
+                  </a:lnTo>
+                  <a:lnTo>
+                    <a:pt x="3760671" y="2649578"/>
+                  </a:lnTo>
+                  <a:lnTo>
+                    <a:pt x="3832294" y="2649200"/>
+                  </a:lnTo>
+                  <a:lnTo>
+                    <a:pt x="3903916" y="2648822"/>
+                  </a:lnTo>
+                  <a:lnTo>
+                    <a:pt x="3975539" y="2648444"/>
+                  </a:lnTo>
+                  <a:lnTo>
+                    <a:pt x="4047161" y="2648065"/>
+                  </a:lnTo>
+                  <a:lnTo>
+                    <a:pt x="4118784" y="2647686"/>
+                  </a:lnTo>
+                  <a:lnTo>
+                    <a:pt x="4190406" y="2647307"/>
+                  </a:lnTo>
+                  <a:lnTo>
+                    <a:pt x="4262029" y="2646928"/>
+                  </a:lnTo>
+                  <a:lnTo>
+                    <a:pt x="4333651" y="2646549"/>
+                  </a:lnTo>
+                  <a:lnTo>
+                    <a:pt x="4405274" y="2646169"/>
+                  </a:lnTo>
+                  <a:lnTo>
+                    <a:pt x="4476896" y="2645790"/>
+                  </a:lnTo>
+                  <a:lnTo>
+                    <a:pt x="4548519" y="2645410"/>
+                  </a:lnTo>
+                  <a:lnTo>
+                    <a:pt x="4620141" y="2645030"/>
+                  </a:lnTo>
+                  <a:lnTo>
+                    <a:pt x="4691764" y="2644650"/>
+                  </a:lnTo>
+                  <a:lnTo>
+                    <a:pt x="4763386" y="2644269"/>
+                  </a:lnTo>
+                  <a:lnTo>
+                    <a:pt x="4835009" y="2643889"/>
+                  </a:lnTo>
+                  <a:lnTo>
+                    <a:pt x="4906632" y="2643508"/>
+                  </a:lnTo>
+                  <a:lnTo>
+                    <a:pt x="4978254" y="2643127"/>
+                  </a:lnTo>
+                  <a:lnTo>
+                    <a:pt x="5049877" y="2642746"/>
+                  </a:lnTo>
+                  <a:lnTo>
+                    <a:pt x="5121499" y="2642365"/>
+                  </a:lnTo>
+                  <a:lnTo>
+                    <a:pt x="5193122" y="2641984"/>
+                  </a:lnTo>
+                  <a:lnTo>
+                    <a:pt x="5264744" y="2641602"/>
+                  </a:lnTo>
+                  <a:lnTo>
+                    <a:pt x="5336367" y="2641220"/>
                   </a:lnTo>
                 </a:path>
               </a:pathLst>
@@ -3728,312 +3728,312 @@
           </p:nvSpPr>
           <p:spPr>
             <a:xfrm>
-              <a:off x="1172049" y="4727837"/>
-              <a:ext cx="7090630" cy="588544"/>
+              <a:off x="1172049" y="4727981"/>
+              <a:ext cx="7090630" cy="588291"/>
             </a:xfrm>
             <a:custGeom>
               <a:avLst/>
               <a:pathLst>
-                <a:path w="7090630" h="588544">
+                <a:path w="7090630" h="588291">
                   <a:moveTo>
-                    <a:pt x="7090630" y="588544"/>
+                    <a:pt x="7090630" y="588291"/>
                   </a:moveTo>
                   <a:lnTo>
-                    <a:pt x="7019007" y="579783"/>
-                  </a:lnTo>
-                  <a:lnTo>
-                    <a:pt x="6947385" y="570704"/>
-                  </a:lnTo>
-                  <a:lnTo>
-                    <a:pt x="6875762" y="561294"/>
-                  </a:lnTo>
-                  <a:lnTo>
-                    <a:pt x="6804139" y="551541"/>
-                  </a:lnTo>
-                  <a:lnTo>
-                    <a:pt x="6732517" y="541434"/>
-                  </a:lnTo>
-                  <a:lnTo>
-                    <a:pt x="6660894" y="530960"/>
-                  </a:lnTo>
-                  <a:lnTo>
-                    <a:pt x="6589272" y="520104"/>
-                  </a:lnTo>
-                  <a:lnTo>
-                    <a:pt x="6517649" y="508854"/>
-                  </a:lnTo>
-                  <a:lnTo>
-                    <a:pt x="6446027" y="497194"/>
-                  </a:lnTo>
-                  <a:lnTo>
-                    <a:pt x="6374404" y="485110"/>
-                  </a:lnTo>
-                  <a:lnTo>
-                    <a:pt x="6302782" y="472587"/>
-                  </a:lnTo>
-                  <a:lnTo>
-                    <a:pt x="6231159" y="459608"/>
-                  </a:lnTo>
-                  <a:lnTo>
-                    <a:pt x="6159537" y="446157"/>
-                  </a:lnTo>
-                  <a:lnTo>
-                    <a:pt x="6087914" y="432217"/>
-                  </a:lnTo>
-                  <a:lnTo>
-                    <a:pt x="6016292" y="417770"/>
-                  </a:lnTo>
-                  <a:lnTo>
-                    <a:pt x="5944669" y="402797"/>
-                  </a:lnTo>
-                  <a:lnTo>
-                    <a:pt x="5873047" y="387280"/>
-                  </a:lnTo>
-                  <a:lnTo>
-                    <a:pt x="5801424" y="371199"/>
-                  </a:lnTo>
-                  <a:lnTo>
-                    <a:pt x="5729802" y="354532"/>
-                  </a:lnTo>
-                  <a:lnTo>
-                    <a:pt x="5658179" y="337259"/>
-                  </a:lnTo>
-                  <a:lnTo>
-                    <a:pt x="5586557" y="319358"/>
-                  </a:lnTo>
-                  <a:lnTo>
-                    <a:pt x="5514934" y="300806"/>
-                  </a:lnTo>
-                  <a:lnTo>
-                    <a:pt x="5443311" y="281579"/>
-                  </a:lnTo>
-                  <a:lnTo>
-                    <a:pt x="5371689" y="261653"/>
-                  </a:lnTo>
-                  <a:lnTo>
-                    <a:pt x="5300066" y="241002"/>
-                  </a:lnTo>
-                  <a:lnTo>
-                    <a:pt x="5228444" y="219599"/>
-                  </a:lnTo>
-                  <a:lnTo>
-                    <a:pt x="5156821" y="197419"/>
-                  </a:lnTo>
-                  <a:lnTo>
-                    <a:pt x="5085199" y="174431"/>
-                  </a:lnTo>
-                  <a:lnTo>
-                    <a:pt x="5013576" y="150607"/>
-                  </a:lnTo>
-                  <a:lnTo>
-                    <a:pt x="4941954" y="125917"/>
-                  </a:lnTo>
-                  <a:lnTo>
-                    <a:pt x="4870331" y="100329"/>
-                  </a:lnTo>
-                  <a:lnTo>
-                    <a:pt x="4798709" y="73810"/>
-                  </a:lnTo>
-                  <a:lnTo>
-                    <a:pt x="4727086" y="46327"/>
-                  </a:lnTo>
-                  <a:lnTo>
-                    <a:pt x="4655464" y="17844"/>
+                    <a:pt x="7019007" y="579496"/>
+                  </a:lnTo>
+                  <a:lnTo>
+                    <a:pt x="6947385" y="570379"/>
+                  </a:lnTo>
+                  <a:lnTo>
+                    <a:pt x="6875762" y="560930"/>
+                  </a:lnTo>
+                  <a:lnTo>
+                    <a:pt x="6804139" y="551136"/>
+                  </a:lnTo>
+                  <a:lnTo>
+                    <a:pt x="6732517" y="540984"/>
+                  </a:lnTo>
+                  <a:lnTo>
+                    <a:pt x="6660894" y="530462"/>
+                  </a:lnTo>
+                  <a:lnTo>
+                    <a:pt x="6589272" y="519556"/>
+                  </a:lnTo>
+                  <a:lnTo>
+                    <a:pt x="6517649" y="508251"/>
+                  </a:lnTo>
+                  <a:lnTo>
+                    <a:pt x="6446027" y="496534"/>
+                  </a:lnTo>
+                  <a:lnTo>
+                    <a:pt x="6374404" y="484390"/>
+                  </a:lnTo>
+                  <a:lnTo>
+                    <a:pt x="6302782" y="471802"/>
+                  </a:lnTo>
+                  <a:lnTo>
+                    <a:pt x="6231159" y="458755"/>
+                  </a:lnTo>
+                  <a:lnTo>
+                    <a:pt x="6159537" y="445231"/>
+                  </a:lnTo>
+                  <a:lnTo>
+                    <a:pt x="6087914" y="431214"/>
+                  </a:lnTo>
+                  <a:lnTo>
+                    <a:pt x="6016292" y="416685"/>
+                  </a:lnTo>
+                  <a:lnTo>
+                    <a:pt x="5944669" y="401626"/>
+                  </a:lnTo>
+                  <a:lnTo>
+                    <a:pt x="5873047" y="386018"/>
+                  </a:lnTo>
+                  <a:lnTo>
+                    <a:pt x="5801424" y="369839"/>
+                  </a:lnTo>
+                  <a:lnTo>
+                    <a:pt x="5729802" y="353070"/>
+                  </a:lnTo>
+                  <a:lnTo>
+                    <a:pt x="5658179" y="335689"/>
+                  </a:lnTo>
+                  <a:lnTo>
+                    <a:pt x="5586557" y="317674"/>
+                  </a:lnTo>
+                  <a:lnTo>
+                    <a:pt x="5514934" y="299001"/>
+                  </a:lnTo>
+                  <a:lnTo>
+                    <a:pt x="5443311" y="279647"/>
+                  </a:lnTo>
+                  <a:lnTo>
+                    <a:pt x="5371689" y="259586"/>
+                  </a:lnTo>
+                  <a:lnTo>
+                    <a:pt x="5300066" y="238793"/>
+                  </a:lnTo>
+                  <a:lnTo>
+                    <a:pt x="5228444" y="217241"/>
+                  </a:lnTo>
+                  <a:lnTo>
+                    <a:pt x="5156821" y="194902"/>
+                  </a:lnTo>
+                  <a:lnTo>
+                    <a:pt x="5085199" y="171748"/>
+                  </a:lnTo>
+                  <a:lnTo>
+                    <a:pt x="5013576" y="147749"/>
+                  </a:lnTo>
+                  <a:lnTo>
+                    <a:pt x="4941954" y="122874"/>
+                  </a:lnTo>
+                  <a:lnTo>
+                    <a:pt x="4870331" y="97091"/>
+                  </a:lnTo>
+                  <a:lnTo>
+                    <a:pt x="4798709" y="70367"/>
+                  </a:lnTo>
+                  <a:lnTo>
+                    <a:pt x="4727086" y="42668"/>
+                  </a:lnTo>
+                  <a:lnTo>
+                    <a:pt x="4655464" y="13957"/>
                   </a:lnTo>
                   <a:lnTo>
                     <a:pt x="4583841" y="0"/>
                   </a:lnTo>
                   <a:lnTo>
-                    <a:pt x="4512219" y="131"/>
-                  </a:lnTo>
-                  <a:lnTo>
-                    <a:pt x="4440596" y="263"/>
-                  </a:lnTo>
-                  <a:lnTo>
-                    <a:pt x="4368974" y="395"/>
-                  </a:lnTo>
-                  <a:lnTo>
-                    <a:pt x="4297351" y="526"/>
-                  </a:lnTo>
-                  <a:lnTo>
-                    <a:pt x="4225729" y="658"/>
-                  </a:lnTo>
-                  <a:lnTo>
-                    <a:pt x="4154106" y="789"/>
-                  </a:lnTo>
-                  <a:lnTo>
-                    <a:pt x="4082483" y="921"/>
-                  </a:lnTo>
-                  <a:lnTo>
-                    <a:pt x="4010861" y="1052"/>
-                  </a:lnTo>
-                  <a:lnTo>
-                    <a:pt x="3939238" y="1184"/>
-                  </a:lnTo>
-                  <a:lnTo>
-                    <a:pt x="3867616" y="1315"/>
-                  </a:lnTo>
-                  <a:lnTo>
-                    <a:pt x="3795993" y="1447"/>
-                  </a:lnTo>
-                  <a:lnTo>
-                    <a:pt x="3724371" y="1578"/>
-                  </a:lnTo>
-                  <a:lnTo>
-                    <a:pt x="3652748" y="1710"/>
-                  </a:lnTo>
-                  <a:lnTo>
-                    <a:pt x="3581126" y="1841"/>
-                  </a:lnTo>
-                  <a:lnTo>
-                    <a:pt x="3509503" y="1973"/>
-                  </a:lnTo>
-                  <a:lnTo>
-                    <a:pt x="3437881" y="2104"/>
-                  </a:lnTo>
-                  <a:lnTo>
-                    <a:pt x="3366258" y="2235"/>
-                  </a:lnTo>
-                  <a:lnTo>
-                    <a:pt x="3294636" y="2367"/>
-                  </a:lnTo>
-                  <a:lnTo>
-                    <a:pt x="3223013" y="2498"/>
-                  </a:lnTo>
-                  <a:lnTo>
-                    <a:pt x="3151391" y="2629"/>
-                  </a:lnTo>
-                  <a:lnTo>
-                    <a:pt x="3079768" y="2761"/>
-                  </a:lnTo>
-                  <a:lnTo>
-                    <a:pt x="3008146" y="2892"/>
-                  </a:lnTo>
-                  <a:lnTo>
-                    <a:pt x="2936523" y="3023"/>
-                  </a:lnTo>
-                  <a:lnTo>
-                    <a:pt x="2864901" y="3154"/>
-                  </a:lnTo>
-                  <a:lnTo>
-                    <a:pt x="2793278" y="3285"/>
-                  </a:lnTo>
-                  <a:lnTo>
-                    <a:pt x="2721655" y="3417"/>
-                  </a:lnTo>
-                  <a:lnTo>
-                    <a:pt x="2650033" y="3548"/>
-                  </a:lnTo>
-                  <a:lnTo>
-                    <a:pt x="2578410" y="3679"/>
-                  </a:lnTo>
-                  <a:lnTo>
-                    <a:pt x="2506788" y="3810"/>
-                  </a:lnTo>
-                  <a:lnTo>
-                    <a:pt x="2435165" y="3941"/>
-                  </a:lnTo>
-                  <a:lnTo>
-                    <a:pt x="2363543" y="4072"/>
-                  </a:lnTo>
-                  <a:lnTo>
-                    <a:pt x="2291920" y="4203"/>
-                  </a:lnTo>
-                  <a:lnTo>
-                    <a:pt x="2220298" y="4334"/>
-                  </a:lnTo>
-                  <a:lnTo>
-                    <a:pt x="2148675" y="4465"/>
-                  </a:lnTo>
-                  <a:lnTo>
-                    <a:pt x="2077053" y="4596"/>
-                  </a:lnTo>
-                  <a:lnTo>
-                    <a:pt x="2005430" y="4727"/>
-                  </a:lnTo>
-                  <a:lnTo>
-                    <a:pt x="1933808" y="4858"/>
-                  </a:lnTo>
-                  <a:lnTo>
-                    <a:pt x="1862185" y="4989"/>
-                  </a:lnTo>
-                  <a:lnTo>
-                    <a:pt x="1790563" y="5120"/>
-                  </a:lnTo>
-                  <a:lnTo>
-                    <a:pt x="1718940" y="5251"/>
-                  </a:lnTo>
-                  <a:lnTo>
-                    <a:pt x="1647318" y="5382"/>
-                  </a:lnTo>
-                  <a:lnTo>
-                    <a:pt x="1575695" y="5512"/>
-                  </a:lnTo>
-                  <a:lnTo>
-                    <a:pt x="1504073" y="5643"/>
-                  </a:lnTo>
-                  <a:lnTo>
-                    <a:pt x="1432450" y="5774"/>
-                  </a:lnTo>
-                  <a:lnTo>
-                    <a:pt x="1360827" y="5905"/>
-                  </a:lnTo>
-                  <a:lnTo>
-                    <a:pt x="1289205" y="6036"/>
-                  </a:lnTo>
-                  <a:lnTo>
-                    <a:pt x="1217582" y="6166"/>
-                  </a:lnTo>
-                  <a:lnTo>
-                    <a:pt x="1145960" y="6297"/>
-                  </a:lnTo>
-                  <a:lnTo>
-                    <a:pt x="1074337" y="6428"/>
-                  </a:lnTo>
-                  <a:lnTo>
-                    <a:pt x="1002715" y="6558"/>
-                  </a:lnTo>
-                  <a:lnTo>
-                    <a:pt x="931092" y="6689"/>
-                  </a:lnTo>
-                  <a:lnTo>
-                    <a:pt x="859470" y="6820"/>
-                  </a:lnTo>
-                  <a:lnTo>
-                    <a:pt x="787847" y="6950"/>
-                  </a:lnTo>
-                  <a:lnTo>
-                    <a:pt x="716225" y="7081"/>
-                  </a:lnTo>
-                  <a:lnTo>
-                    <a:pt x="644602" y="7211"/>
-                  </a:lnTo>
-                  <a:lnTo>
-                    <a:pt x="572980" y="7342"/>
-                  </a:lnTo>
-                  <a:lnTo>
-                    <a:pt x="501357" y="7472"/>
-                  </a:lnTo>
-                  <a:lnTo>
-                    <a:pt x="429735" y="7603"/>
-                  </a:lnTo>
-                  <a:lnTo>
-                    <a:pt x="358112" y="7733"/>
-                  </a:lnTo>
-                  <a:lnTo>
-                    <a:pt x="286490" y="7864"/>
-                  </a:lnTo>
-                  <a:lnTo>
-                    <a:pt x="214867" y="7994"/>
-                  </a:lnTo>
-                  <a:lnTo>
-                    <a:pt x="143245" y="8125"/>
-                  </a:lnTo>
-                  <a:lnTo>
-                    <a:pt x="71622" y="8255"/>
-                  </a:lnTo>
-                  <a:lnTo>
-                    <a:pt x="0" y="8386"/>
+                    <a:pt x="4512219" y="375"/>
+                  </a:lnTo>
+                  <a:lnTo>
+                    <a:pt x="4440596" y="751"/>
+                  </a:lnTo>
+                  <a:lnTo>
+                    <a:pt x="4368974" y="1126"/>
+                  </a:lnTo>
+                  <a:lnTo>
+                    <a:pt x="4297351" y="1501"/>
+                  </a:lnTo>
+                  <a:lnTo>
+                    <a:pt x="4225729" y="1876"/>
+                  </a:lnTo>
+                  <a:lnTo>
+                    <a:pt x="4154106" y="2251"/>
+                  </a:lnTo>
+                  <a:lnTo>
+                    <a:pt x="4082483" y="2626"/>
+                  </a:lnTo>
+                  <a:lnTo>
+                    <a:pt x="4010861" y="3000"/>
+                  </a:lnTo>
+                  <a:lnTo>
+                    <a:pt x="3939238" y="3375"/>
+                  </a:lnTo>
+                  <a:lnTo>
+                    <a:pt x="3867616" y="3749"/>
+                  </a:lnTo>
+                  <a:lnTo>
+                    <a:pt x="3795993" y="4123"/>
+                  </a:lnTo>
+                  <a:lnTo>
+                    <a:pt x="3724371" y="4497"/>
+                  </a:lnTo>
+                  <a:lnTo>
+                    <a:pt x="3652748" y="4871"/>
+                  </a:lnTo>
+                  <a:lnTo>
+                    <a:pt x="3581126" y="5244"/>
+                  </a:lnTo>
+                  <a:lnTo>
+                    <a:pt x="3509503" y="5617"/>
+                  </a:lnTo>
+                  <a:lnTo>
+                    <a:pt x="3437881" y="5991"/>
+                  </a:lnTo>
+                  <a:lnTo>
+                    <a:pt x="3366258" y="6364"/>
+                  </a:lnTo>
+                  <a:lnTo>
+                    <a:pt x="3294636" y="6736"/>
+                  </a:lnTo>
+                  <a:lnTo>
+                    <a:pt x="3223013" y="7109"/>
+                  </a:lnTo>
+                  <a:lnTo>
+                    <a:pt x="3151391" y="7482"/>
+                  </a:lnTo>
+                  <a:lnTo>
+                    <a:pt x="3079768" y="7854"/>
+                  </a:lnTo>
+                  <a:lnTo>
+                    <a:pt x="3008146" y="8226"/>
+                  </a:lnTo>
+                  <a:lnTo>
+                    <a:pt x="2936523" y="8598"/>
+                  </a:lnTo>
+                  <a:lnTo>
+                    <a:pt x="2864901" y="8970"/>
+                  </a:lnTo>
+                  <a:lnTo>
+                    <a:pt x="2793278" y="9342"/>
+                  </a:lnTo>
+                  <a:lnTo>
+                    <a:pt x="2721655" y="9713"/>
+                  </a:lnTo>
+                  <a:lnTo>
+                    <a:pt x="2650033" y="10084"/>
+                  </a:lnTo>
+                  <a:lnTo>
+                    <a:pt x="2578410" y="10455"/>
+                  </a:lnTo>
+                  <a:lnTo>
+                    <a:pt x="2506788" y="10826"/>
+                  </a:lnTo>
+                  <a:lnTo>
+                    <a:pt x="2435165" y="11197"/>
+                  </a:lnTo>
+                  <a:lnTo>
+                    <a:pt x="2363543" y="11568"/>
+                  </a:lnTo>
+                  <a:lnTo>
+                    <a:pt x="2291920" y="11938"/>
+                  </a:lnTo>
+                  <a:lnTo>
+                    <a:pt x="2220298" y="12309"/>
+                  </a:lnTo>
+                  <a:lnTo>
+                    <a:pt x="2148675" y="12679"/>
+                  </a:lnTo>
+                  <a:lnTo>
+                    <a:pt x="2077053" y="13049"/>
+                  </a:lnTo>
+                  <a:lnTo>
+                    <a:pt x="2005430" y="13419"/>
+                  </a:lnTo>
+                  <a:lnTo>
+                    <a:pt x="1933808" y="13788"/>
+                  </a:lnTo>
+                  <a:lnTo>
+                    <a:pt x="1862185" y="14158"/>
+                  </a:lnTo>
+                  <a:lnTo>
+                    <a:pt x="1790563" y="14527"/>
+                  </a:lnTo>
+                  <a:lnTo>
+                    <a:pt x="1718940" y="14896"/>
+                  </a:lnTo>
+                  <a:lnTo>
+                    <a:pt x="1647318" y="15265"/>
+                  </a:lnTo>
+                  <a:lnTo>
+                    <a:pt x="1575695" y="15634"/>
+                  </a:lnTo>
+                  <a:lnTo>
+                    <a:pt x="1504073" y="16003"/>
+                  </a:lnTo>
+                  <a:lnTo>
+                    <a:pt x="1432450" y="16371"/>
+                  </a:lnTo>
+                  <a:lnTo>
+                    <a:pt x="1360827" y="16739"/>
+                  </a:lnTo>
+                  <a:lnTo>
+                    <a:pt x="1289205" y="17107"/>
+                  </a:lnTo>
+                  <a:lnTo>
+                    <a:pt x="1217582" y="17475"/>
+                  </a:lnTo>
+                  <a:lnTo>
+                    <a:pt x="1145960" y="17843"/>
+                  </a:lnTo>
+                  <a:lnTo>
+                    <a:pt x="1074337" y="18211"/>
+                  </a:lnTo>
+                  <a:lnTo>
+                    <a:pt x="1002715" y="18578"/>
+                  </a:lnTo>
+                  <a:lnTo>
+                    <a:pt x="931092" y="18946"/>
+                  </a:lnTo>
+                  <a:lnTo>
+                    <a:pt x="859470" y="19313"/>
+                  </a:lnTo>
+                  <a:lnTo>
+                    <a:pt x="787847" y="19680"/>
+                  </a:lnTo>
+                  <a:lnTo>
+                    <a:pt x="716225" y="20046"/>
+                  </a:lnTo>
+                  <a:lnTo>
+                    <a:pt x="644602" y="20413"/>
+                  </a:lnTo>
+                  <a:lnTo>
+                    <a:pt x="572980" y="20780"/>
+                  </a:lnTo>
+                  <a:lnTo>
+                    <a:pt x="501357" y="21146"/>
+                  </a:lnTo>
+                  <a:lnTo>
+                    <a:pt x="429735" y="21512"/>
+                  </a:lnTo>
+                  <a:lnTo>
+                    <a:pt x="358112" y="21878"/>
+                  </a:lnTo>
+                  <a:lnTo>
+                    <a:pt x="286490" y="22244"/>
+                  </a:lnTo>
+                  <a:lnTo>
+                    <a:pt x="214867" y="22609"/>
+                  </a:lnTo>
+                  <a:lnTo>
+                    <a:pt x="143245" y="22975"/>
+                  </a:lnTo>
+                  <a:lnTo>
+                    <a:pt x="71622" y="23340"/>
+                  </a:lnTo>
+                  <a:lnTo>
+                    <a:pt x="0" y="23705"/>
                   </a:lnTo>
                 </a:path>
               </a:pathLst>
@@ -4053,312 +4053,312 @@
           </p:nvSpPr>
           <p:spPr>
             <a:xfrm>
-              <a:off x="1172049" y="2950412"/>
-              <a:ext cx="7090630" cy="2158628"/>
+              <a:off x="1172049" y="2958849"/>
+              <a:ext cx="7090630" cy="2147812"/>
             </a:xfrm>
             <a:custGeom>
               <a:avLst/>
               <a:pathLst>
-                <a:path w="7090630" h="2158628">
+                <a:path w="7090630" h="2147812">
                   <a:moveTo>
                     <a:pt x="0" y="0"/>
                   </a:moveTo>
                   <a:lnTo>
-                    <a:pt x="71622" y="45950"/>
-                  </a:lnTo>
-                  <a:lnTo>
-                    <a:pt x="143245" y="91091"/>
-                  </a:lnTo>
-                  <a:lnTo>
-                    <a:pt x="214867" y="135436"/>
-                  </a:lnTo>
-                  <a:lnTo>
-                    <a:pt x="286490" y="178999"/>
-                  </a:lnTo>
-                  <a:lnTo>
-                    <a:pt x="358112" y="221794"/>
-                  </a:lnTo>
-                  <a:lnTo>
-                    <a:pt x="429735" y="263836"/>
-                  </a:lnTo>
-                  <a:lnTo>
-                    <a:pt x="501357" y="305136"/>
-                  </a:lnTo>
-                  <a:lnTo>
-                    <a:pt x="572980" y="345708"/>
-                  </a:lnTo>
-                  <a:lnTo>
-                    <a:pt x="644602" y="385564"/>
-                  </a:lnTo>
-                  <a:lnTo>
-                    <a:pt x="716225" y="424719"/>
-                  </a:lnTo>
-                  <a:lnTo>
-                    <a:pt x="787847" y="463183"/>
-                  </a:lnTo>
-                  <a:lnTo>
-                    <a:pt x="859470" y="500969"/>
-                  </a:lnTo>
-                  <a:lnTo>
-                    <a:pt x="931092" y="538089"/>
-                  </a:lnTo>
-                  <a:lnTo>
-                    <a:pt x="1002715" y="574555"/>
-                  </a:lnTo>
-                  <a:lnTo>
-                    <a:pt x="1074337" y="610378"/>
-                  </a:lnTo>
-                  <a:lnTo>
-                    <a:pt x="1145960" y="645569"/>
-                  </a:lnTo>
-                  <a:lnTo>
-                    <a:pt x="1217582" y="680140"/>
-                  </a:lnTo>
-                  <a:lnTo>
-                    <a:pt x="1289205" y="714102"/>
-                  </a:lnTo>
-                  <a:lnTo>
-                    <a:pt x="1360827" y="747465"/>
-                  </a:lnTo>
-                  <a:lnTo>
-                    <a:pt x="1432450" y="780240"/>
-                  </a:lnTo>
-                  <a:lnTo>
-                    <a:pt x="1504073" y="812438"/>
-                  </a:lnTo>
-                  <a:lnTo>
-                    <a:pt x="1575695" y="844068"/>
-                  </a:lnTo>
-                  <a:lnTo>
-                    <a:pt x="1647318" y="875140"/>
-                  </a:lnTo>
-                  <a:lnTo>
-                    <a:pt x="1718940" y="905664"/>
-                  </a:lnTo>
-                  <a:lnTo>
-                    <a:pt x="1790563" y="935651"/>
-                  </a:lnTo>
-                  <a:lnTo>
-                    <a:pt x="1862185" y="965109"/>
-                  </a:lnTo>
-                  <a:lnTo>
-                    <a:pt x="1933808" y="994048"/>
-                  </a:lnTo>
-                  <a:lnTo>
-                    <a:pt x="2005430" y="1022476"/>
-                  </a:lnTo>
-                  <a:lnTo>
-                    <a:pt x="2077053" y="1050404"/>
-                  </a:lnTo>
-                  <a:lnTo>
-                    <a:pt x="2148675" y="1077839"/>
-                  </a:lnTo>
-                  <a:lnTo>
-                    <a:pt x="2220298" y="1104790"/>
-                  </a:lnTo>
-                  <a:lnTo>
-                    <a:pt x="2291920" y="1131267"/>
-                  </a:lnTo>
-                  <a:lnTo>
-                    <a:pt x="2363543" y="1157277"/>
-                  </a:lnTo>
-                  <a:lnTo>
-                    <a:pt x="2435165" y="1182828"/>
-                  </a:lnTo>
-                  <a:lnTo>
-                    <a:pt x="2506788" y="1207929"/>
-                  </a:lnTo>
-                  <a:lnTo>
-                    <a:pt x="2578410" y="1232588"/>
-                  </a:lnTo>
-                  <a:lnTo>
-                    <a:pt x="2650033" y="1256811"/>
-                  </a:lnTo>
-                  <a:lnTo>
-                    <a:pt x="2721655" y="1280608"/>
-                  </a:lnTo>
-                  <a:lnTo>
-                    <a:pt x="2793278" y="1303986"/>
-                  </a:lnTo>
-                  <a:lnTo>
-                    <a:pt x="2864901" y="1326951"/>
-                  </a:lnTo>
-                  <a:lnTo>
-                    <a:pt x="2936523" y="1349511"/>
-                  </a:lnTo>
-                  <a:lnTo>
-                    <a:pt x="3008146" y="1371674"/>
-                  </a:lnTo>
-                  <a:lnTo>
-                    <a:pt x="3079768" y="1393446"/>
-                  </a:lnTo>
-                  <a:lnTo>
-                    <a:pt x="3151391" y="1414835"/>
-                  </a:lnTo>
-                  <a:lnTo>
-                    <a:pt x="3223013" y="1435846"/>
-                  </a:lnTo>
-                  <a:lnTo>
-                    <a:pt x="3294636" y="1456487"/>
-                  </a:lnTo>
-                  <a:lnTo>
-                    <a:pt x="3366258" y="1476764"/>
-                  </a:lnTo>
-                  <a:lnTo>
-                    <a:pt x="3437881" y="1496684"/>
-                  </a:lnTo>
-                  <a:lnTo>
-                    <a:pt x="3509503" y="1516253"/>
-                  </a:lnTo>
-                  <a:lnTo>
-                    <a:pt x="3581126" y="1535476"/>
-                  </a:lnTo>
-                  <a:lnTo>
-                    <a:pt x="3652748" y="1554361"/>
-                  </a:lnTo>
-                  <a:lnTo>
-                    <a:pt x="3724371" y="1572913"/>
-                  </a:lnTo>
-                  <a:lnTo>
-                    <a:pt x="3795993" y="1591138"/>
-                  </a:lnTo>
-                  <a:lnTo>
-                    <a:pt x="3867616" y="1609042"/>
-                  </a:lnTo>
-                  <a:lnTo>
-                    <a:pt x="3939238" y="1626630"/>
-                  </a:lnTo>
-                  <a:lnTo>
-                    <a:pt x="4010861" y="1643908"/>
-                  </a:lnTo>
-                  <a:lnTo>
-                    <a:pt x="4082483" y="1660882"/>
-                  </a:lnTo>
-                  <a:lnTo>
-                    <a:pt x="4154106" y="1677556"/>
-                  </a:lnTo>
-                  <a:lnTo>
-                    <a:pt x="4225729" y="1693936"/>
-                  </a:lnTo>
-                  <a:lnTo>
-                    <a:pt x="4297351" y="1710028"/>
-                  </a:lnTo>
-                  <a:lnTo>
-                    <a:pt x="4368974" y="1725836"/>
-                  </a:lnTo>
-                  <a:lnTo>
-                    <a:pt x="4440596" y="1741365"/>
-                  </a:lnTo>
-                  <a:lnTo>
-                    <a:pt x="4512219" y="1756621"/>
-                  </a:lnTo>
-                  <a:lnTo>
-                    <a:pt x="4583841" y="1771608"/>
-                  </a:lnTo>
-                  <a:lnTo>
-                    <a:pt x="4655464" y="1786330"/>
-                  </a:lnTo>
-                  <a:lnTo>
-                    <a:pt x="4727086" y="1800793"/>
-                  </a:lnTo>
-                  <a:lnTo>
-                    <a:pt x="4798709" y="1815001"/>
-                  </a:lnTo>
-                  <a:lnTo>
-                    <a:pt x="4870331" y="1828959"/>
-                  </a:lnTo>
-                  <a:lnTo>
-                    <a:pt x="4941954" y="1842671"/>
-                  </a:lnTo>
-                  <a:lnTo>
-                    <a:pt x="5013576" y="1856141"/>
-                  </a:lnTo>
-                  <a:lnTo>
-                    <a:pt x="5085199" y="1869373"/>
-                  </a:lnTo>
-                  <a:lnTo>
-                    <a:pt x="5156821" y="1882372"/>
-                  </a:lnTo>
-                  <a:lnTo>
-                    <a:pt x="5228444" y="1895143"/>
-                  </a:lnTo>
-                  <a:lnTo>
-                    <a:pt x="5300066" y="1907688"/>
-                  </a:lnTo>
-                  <a:lnTo>
-                    <a:pt x="5371689" y="1920011"/>
-                  </a:lnTo>
-                  <a:lnTo>
-                    <a:pt x="5443311" y="1932118"/>
-                  </a:lnTo>
-                  <a:lnTo>
-                    <a:pt x="5514934" y="1944011"/>
-                  </a:lnTo>
-                  <a:lnTo>
-                    <a:pt x="5586557" y="1955695"/>
-                  </a:lnTo>
-                  <a:lnTo>
-                    <a:pt x="5658179" y="1967173"/>
-                  </a:lnTo>
-                  <a:lnTo>
-                    <a:pt x="5729802" y="1978448"/>
-                  </a:lnTo>
-                  <a:lnTo>
-                    <a:pt x="5801424" y="1989525"/>
-                  </a:lnTo>
-                  <a:lnTo>
-                    <a:pt x="5873047" y="2000406"/>
-                  </a:lnTo>
-                  <a:lnTo>
-                    <a:pt x="5944669" y="2011095"/>
-                  </a:lnTo>
-                  <a:lnTo>
-                    <a:pt x="6016292" y="2021597"/>
-                  </a:lnTo>
-                  <a:lnTo>
-                    <a:pt x="6087914" y="2031913"/>
-                  </a:lnTo>
-                  <a:lnTo>
-                    <a:pt x="6159537" y="2042047"/>
-                  </a:lnTo>
-                  <a:lnTo>
-                    <a:pt x="6231159" y="2052002"/>
-                  </a:lnTo>
-                  <a:lnTo>
-                    <a:pt x="6302782" y="2061782"/>
-                  </a:lnTo>
-                  <a:lnTo>
-                    <a:pt x="6374404" y="2071390"/>
-                  </a:lnTo>
-                  <a:lnTo>
-                    <a:pt x="6446027" y="2080828"/>
-                  </a:lnTo>
-                  <a:lnTo>
-                    <a:pt x="6517649" y="2090100"/>
-                  </a:lnTo>
-                  <a:lnTo>
-                    <a:pt x="6589272" y="2099209"/>
-                  </a:lnTo>
-                  <a:lnTo>
-                    <a:pt x="6660894" y="2108157"/>
-                  </a:lnTo>
-                  <a:lnTo>
-                    <a:pt x="6732517" y="2116947"/>
-                  </a:lnTo>
-                  <a:lnTo>
-                    <a:pt x="6804139" y="2125582"/>
-                  </a:lnTo>
-                  <a:lnTo>
-                    <a:pt x="6875762" y="2134065"/>
-                  </a:lnTo>
-                  <a:lnTo>
-                    <a:pt x="6947385" y="2142399"/>
-                  </a:lnTo>
-                  <a:lnTo>
-                    <a:pt x="7019007" y="2150585"/>
-                  </a:lnTo>
-                  <a:lnTo>
-                    <a:pt x="7090630" y="2158628"/>
+                    <a:pt x="71622" y="45581"/>
+                  </a:lnTo>
+                  <a:lnTo>
+                    <a:pt x="143245" y="90364"/>
+                  </a:lnTo>
+                  <a:lnTo>
+                    <a:pt x="214867" y="134360"/>
+                  </a:lnTo>
+                  <a:lnTo>
+                    <a:pt x="286490" y="177585"/>
+                  </a:lnTo>
+                  <a:lnTo>
+                    <a:pt x="358112" y="220052"/>
+                  </a:lnTo>
+                  <a:lnTo>
+                    <a:pt x="429735" y="261773"/>
+                  </a:lnTo>
+                  <a:lnTo>
+                    <a:pt x="501357" y="302763"/>
+                  </a:lnTo>
+                  <a:lnTo>
+                    <a:pt x="572980" y="343034"/>
+                  </a:lnTo>
+                  <a:lnTo>
+                    <a:pt x="644602" y="382598"/>
+                  </a:lnTo>
+                  <a:lnTo>
+                    <a:pt x="716225" y="421468"/>
+                  </a:lnTo>
+                  <a:lnTo>
+                    <a:pt x="787847" y="459657"/>
+                  </a:lnTo>
+                  <a:lnTo>
+                    <a:pt x="859470" y="497175"/>
+                  </a:lnTo>
+                  <a:lnTo>
+                    <a:pt x="931092" y="534035"/>
+                  </a:lnTo>
+                  <a:lnTo>
+                    <a:pt x="1002715" y="570249"/>
+                  </a:lnTo>
+                  <a:lnTo>
+                    <a:pt x="1074337" y="605827"/>
+                  </a:lnTo>
+                  <a:lnTo>
+                    <a:pt x="1145960" y="640782"/>
+                  </a:lnTo>
+                  <a:lnTo>
+                    <a:pt x="1217582" y="675123"/>
+                  </a:lnTo>
+                  <a:lnTo>
+                    <a:pt x="1289205" y="708862"/>
+                  </a:lnTo>
+                  <a:lnTo>
+                    <a:pt x="1360827" y="742008"/>
+                  </a:lnTo>
+                  <a:lnTo>
+                    <a:pt x="1432450" y="774574"/>
+                  </a:lnTo>
+                  <a:lnTo>
+                    <a:pt x="1504073" y="806568"/>
+                  </a:lnTo>
+                  <a:lnTo>
+                    <a:pt x="1575695" y="838001"/>
+                  </a:lnTo>
+                  <a:lnTo>
+                    <a:pt x="1647318" y="868882"/>
+                  </a:lnTo>
+                  <a:lnTo>
+                    <a:pt x="1718940" y="899222"/>
+                  </a:lnTo>
+                  <a:lnTo>
+                    <a:pt x="1790563" y="929029"/>
+                  </a:lnTo>
+                  <a:lnTo>
+                    <a:pt x="1862185" y="958314"/>
+                  </a:lnTo>
+                  <a:lnTo>
+                    <a:pt x="1933808" y="987085"/>
+                  </a:lnTo>
+                  <a:lnTo>
+                    <a:pt x="2005430" y="1015351"/>
+                  </a:lnTo>
+                  <a:lnTo>
+                    <a:pt x="2077053" y="1043121"/>
+                  </a:lnTo>
+                  <a:lnTo>
+                    <a:pt x="2148675" y="1070404"/>
+                  </a:lnTo>
+                  <a:lnTo>
+                    <a:pt x="2220298" y="1097209"/>
+                  </a:lnTo>
+                  <a:lnTo>
+                    <a:pt x="2291920" y="1123543"/>
+                  </a:lnTo>
+                  <a:lnTo>
+                    <a:pt x="2363543" y="1149415"/>
+                  </a:lnTo>
+                  <a:lnTo>
+                    <a:pt x="2435165" y="1174834"/>
+                  </a:lnTo>
+                  <a:lnTo>
+                    <a:pt x="2506788" y="1199806"/>
+                  </a:lnTo>
+                  <a:lnTo>
+                    <a:pt x="2578410" y="1224341"/>
+                  </a:lnTo>
+                  <a:lnTo>
+                    <a:pt x="2650033" y="1248445"/>
+                  </a:lnTo>
+                  <a:lnTo>
+                    <a:pt x="2721655" y="1272126"/>
+                  </a:lnTo>
+                  <a:lnTo>
+                    <a:pt x="2793278" y="1295392"/>
+                  </a:lnTo>
+                  <a:lnTo>
+                    <a:pt x="2864901" y="1318250"/>
+                  </a:lnTo>
+                  <a:lnTo>
+                    <a:pt x="2936523" y="1340707"/>
+                  </a:lnTo>
+                  <a:lnTo>
+                    <a:pt x="3008146" y="1362769"/>
+                  </a:lnTo>
+                  <a:lnTo>
+                    <a:pt x="3079768" y="1384445"/>
+                  </a:lnTo>
+                  <a:lnTo>
+                    <a:pt x="3151391" y="1405741"/>
+                  </a:lnTo>
+                  <a:lnTo>
+                    <a:pt x="3223013" y="1426663"/>
+                  </a:lnTo>
+                  <a:lnTo>
+                    <a:pt x="3294636" y="1447218"/>
+                  </a:lnTo>
+                  <a:lnTo>
+                    <a:pt x="3366258" y="1467412"/>
+                  </a:lnTo>
+                  <a:lnTo>
+                    <a:pt x="3437881" y="1487252"/>
+                  </a:lnTo>
+                  <a:lnTo>
+                    <a:pt x="3509503" y="1506744"/>
+                  </a:lnTo>
+                  <a:lnTo>
+                    <a:pt x="3581126" y="1525894"/>
+                  </a:lnTo>
+                  <a:lnTo>
+                    <a:pt x="3652748" y="1544709"/>
+                  </a:lnTo>
+                  <a:lnTo>
+                    <a:pt x="3724371" y="1563193"/>
+                  </a:lnTo>
+                  <a:lnTo>
+                    <a:pt x="3795993" y="1581353"/>
+                  </a:lnTo>
+                  <a:lnTo>
+                    <a:pt x="3867616" y="1599194"/>
+                  </a:lnTo>
+                  <a:lnTo>
+                    <a:pt x="3939238" y="1616722"/>
+                  </a:lnTo>
+                  <a:lnTo>
+                    <a:pt x="4010861" y="1633943"/>
+                  </a:lnTo>
+                  <a:lnTo>
+                    <a:pt x="4082483" y="1650862"/>
+                  </a:lnTo>
+                  <a:lnTo>
+                    <a:pt x="4154106" y="1667484"/>
+                  </a:lnTo>
+                  <a:lnTo>
+                    <a:pt x="4225729" y="1683814"/>
+                  </a:lnTo>
+                  <a:lnTo>
+                    <a:pt x="4297351" y="1699858"/>
+                  </a:lnTo>
+                  <a:lnTo>
+                    <a:pt x="4368974" y="1715621"/>
+                  </a:lnTo>
+                  <a:lnTo>
+                    <a:pt x="4440596" y="1731107"/>
+                  </a:lnTo>
+                  <a:lnTo>
+                    <a:pt x="4512219" y="1746321"/>
+                  </a:lnTo>
+                  <a:lnTo>
+                    <a:pt x="4583841" y="1761268"/>
+                  </a:lnTo>
+                  <a:lnTo>
+                    <a:pt x="4655464" y="1775953"/>
+                  </a:lnTo>
+                  <a:lnTo>
+                    <a:pt x="4727086" y="1790381"/>
+                  </a:lnTo>
+                  <a:lnTo>
+                    <a:pt x="4798709" y="1804556"/>
+                  </a:lnTo>
+                  <a:lnTo>
+                    <a:pt x="4870331" y="1818481"/>
+                  </a:lnTo>
+                  <a:lnTo>
+                    <a:pt x="4941954" y="1832163"/>
+                  </a:lnTo>
+                  <a:lnTo>
+                    <a:pt x="5013576" y="1845604"/>
+                  </a:lnTo>
+                  <a:lnTo>
+                    <a:pt x="5085199" y="1858810"/>
+                  </a:lnTo>
+                  <a:lnTo>
+                    <a:pt x="5156821" y="1871784"/>
+                  </a:lnTo>
+                  <a:lnTo>
+                    <a:pt x="5228444" y="1884531"/>
+                  </a:lnTo>
+                  <a:lnTo>
+                    <a:pt x="5300066" y="1897054"/>
+                  </a:lnTo>
+                  <a:lnTo>
+                    <a:pt x="5371689" y="1909357"/>
+                  </a:lnTo>
+                  <a:lnTo>
+                    <a:pt x="5443311" y="1921444"/>
+                  </a:lnTo>
+                  <a:lnTo>
+                    <a:pt x="5514934" y="1933320"/>
+                  </a:lnTo>
+                  <a:lnTo>
+                    <a:pt x="5586557" y="1944987"/>
+                  </a:lnTo>
+                  <a:lnTo>
+                    <a:pt x="5658179" y="1956449"/>
+                  </a:lnTo>
+                  <a:lnTo>
+                    <a:pt x="5729802" y="1967710"/>
+                  </a:lnTo>
+                  <a:lnTo>
+                    <a:pt x="5801424" y="1978774"/>
+                  </a:lnTo>
+                  <a:lnTo>
+                    <a:pt x="5873047" y="1989644"/>
+                  </a:lnTo>
+                  <a:lnTo>
+                    <a:pt x="5944669" y="2000323"/>
+                  </a:lnTo>
+                  <a:lnTo>
+                    <a:pt x="6016292" y="2010814"/>
+                  </a:lnTo>
+                  <a:lnTo>
+                    <a:pt x="6087914" y="2021122"/>
+                  </a:lnTo>
+                  <a:lnTo>
+                    <a:pt x="6159537" y="2031249"/>
+                  </a:lnTo>
+                  <a:lnTo>
+                    <a:pt x="6231159" y="2041198"/>
+                  </a:lnTo>
+                  <a:lnTo>
+                    <a:pt x="6302782" y="2050972"/>
+                  </a:lnTo>
+                  <a:lnTo>
+                    <a:pt x="6374404" y="2060575"/>
+                  </a:lnTo>
+                  <a:lnTo>
+                    <a:pt x="6446027" y="2070010"/>
+                  </a:lnTo>
+                  <a:lnTo>
+                    <a:pt x="6517649" y="2079279"/>
+                  </a:lnTo>
+                  <a:lnTo>
+                    <a:pt x="6589272" y="2088386"/>
+                  </a:lnTo>
+                  <a:lnTo>
+                    <a:pt x="6660894" y="2097333"/>
+                  </a:lnTo>
+                  <a:lnTo>
+                    <a:pt x="6732517" y="2106122"/>
+                  </a:lnTo>
+                  <a:lnTo>
+                    <a:pt x="6804139" y="2114758"/>
+                  </a:lnTo>
+                  <a:lnTo>
+                    <a:pt x="6875762" y="2123242"/>
+                  </a:lnTo>
+                  <a:lnTo>
+                    <a:pt x="6947385" y="2131578"/>
+                  </a:lnTo>
+                  <a:lnTo>
+                    <a:pt x="7019007" y="2139767"/>
+                  </a:lnTo>
+                  <a:lnTo>
+                    <a:pt x="7090630" y="2147812"/>
                   </a:lnTo>
                 </a:path>
               </a:pathLst>
@@ -4430,7 +4430,7 @@
           </p:nvSpPr>
           <p:spPr>
             <a:xfrm>
-              <a:off x="5783789" y="2073503"/>
+              <a:off x="5793129" y="2073503"/>
               <a:ext cx="0" cy="3649639"/>
             </a:xfrm>
             <a:custGeom>
@@ -4473,7 +4473,7 @@
           </p:nvSpPr>
           <p:spPr>
             <a:xfrm>
-              <a:off x="4658599" y="2073503"/>
+              <a:off x="4667548" y="2073503"/>
               <a:ext cx="0" cy="3649639"/>
             </a:xfrm>
             <a:custGeom>
@@ -4516,7 +4516,7 @@
           </p:nvSpPr>
           <p:spPr>
             <a:xfrm>
-              <a:off x="6864197" y="2073503"/>
+              <a:off x="6868063" y="2073503"/>
               <a:ext cx="0" cy="3649639"/>
             </a:xfrm>
             <a:custGeom>
@@ -4789,7 +4789,7 @@
           </p:nvSpPr>
           <p:spPr>
             <a:xfrm>
-              <a:off x="3120823" y="5785772"/>
+              <a:off x="3120990" y="5785772"/>
               <a:ext cx="161574" cy="80101"/>
             </a:xfrm>
             <a:prstGeom prst="rect">
@@ -4835,7 +4835,7 @@
           </p:nvSpPr>
           <p:spPr>
             <a:xfrm>
-              <a:off x="5688698" y="5785772"/>
+              <a:off x="5688107" y="5785772"/>
               <a:ext cx="62179" cy="80101"/>
             </a:xfrm>
             <a:prstGeom prst="rect">
@@ -4881,7 +4881,7 @@
           </p:nvSpPr>
           <p:spPr>
             <a:xfrm>
-              <a:off x="8175787" y="5785772"/>
+              <a:off x="8174437" y="5785772"/>
               <a:ext cx="124358" cy="80101"/>
             </a:xfrm>
             <a:prstGeom prst="rect">
@@ -5052,7 +5052,7 @@
                   <a:latin typeface="Helvetica"/>
                   <a:cs typeface="Helvetica"/>
                 </a:rPr>
-                <a:t>subHR per 10 mL/min decline: 1.28 (1.00-1.65), p_Bonf = 0.312 (n = 6)  |  per IQR decline (Δ = 21.9): 1.73 (1.00-3.00)  |  IQR: [-10.5, 11.4]</a:t>
+                <a:t>subHR per 10 mL/min decline: 1.28 (0.99-1.66), p_Bonf = 0.336 (n = 6)  |  per IQR decline (Δ = 21.9): 1.72 (0.99-3.01)  |  IQR: [-10.4, 11.4]</a:t>
               </a:r>
             </a:p>
           </p:txBody>
